--- a/Memory Management.pptx
+++ b/Memory Management.pptx
@@ -29,35 +29,41 @@
     <p:sldId id="272" r:id="rId24"/>
     <p:sldId id="273" r:id="rId25"/>
     <p:sldId id="274" r:id="rId26"/>
-    <p:sldId id="275" r:id="rId27"/>
-    <p:sldId id="276" r:id="rId28"/>
-    <p:sldId id="277" r:id="rId29"/>
-    <p:sldId id="278" r:id="rId30"/>
-    <p:sldId id="279" r:id="rId31"/>
-    <p:sldId id="280" r:id="rId32"/>
-    <p:sldId id="281" r:id="rId33"/>
-    <p:sldId id="282" r:id="rId34"/>
-    <p:sldId id="283" r:id="rId35"/>
-    <p:sldId id="284" r:id="rId36"/>
-    <p:sldId id="285" r:id="rId37"/>
-    <p:sldId id="286" r:id="rId38"/>
-    <p:sldId id="288" r:id="rId39"/>
-    <p:sldId id="289" r:id="rId40"/>
-    <p:sldId id="290" r:id="rId41"/>
-    <p:sldId id="291" r:id="rId42"/>
-    <p:sldId id="292" r:id="rId43"/>
-    <p:sldId id="293" r:id="rId44"/>
+    <p:sldId id="299" r:id="rId27"/>
+    <p:sldId id="275" r:id="rId28"/>
+    <p:sldId id="276" r:id="rId29"/>
+    <p:sldId id="277" r:id="rId30"/>
+    <p:sldId id="278" r:id="rId31"/>
+    <p:sldId id="300" r:id="rId32"/>
+    <p:sldId id="279" r:id="rId33"/>
+    <p:sldId id="301" r:id="rId34"/>
+    <p:sldId id="280" r:id="rId35"/>
+    <p:sldId id="302" r:id="rId36"/>
+    <p:sldId id="281" r:id="rId37"/>
+    <p:sldId id="282" r:id="rId38"/>
+    <p:sldId id="283" r:id="rId39"/>
+    <p:sldId id="284" r:id="rId40"/>
+    <p:sldId id="285" r:id="rId41"/>
+    <p:sldId id="286" r:id="rId42"/>
+    <p:sldId id="288" r:id="rId43"/>
+    <p:sldId id="304" r:id="rId44"/>
+    <p:sldId id="303" r:id="rId45"/>
+    <p:sldId id="289" r:id="rId46"/>
+    <p:sldId id="290" r:id="rId47"/>
+    <p:sldId id="291" r:id="rId48"/>
+    <p:sldId id="292" r:id="rId49"/>
+    <p:sldId id="293" r:id="rId50"/>
   </p:sldIdLst>
   <p:sldSz cx="12192000" cy="6858000"/>
   <p:notesSz cx="6858000" cy="9144000"/>
   <p:embeddedFontLst>
     <p:embeddedFont>
       <p:font typeface="Rockwell" panose="02060503020205020403" charset="0"/>
-      <p:regular r:id="rId48"/>
+      <p:regular r:id="rId54"/>
     </p:embeddedFont>
     <p:embeddedFont>
       <p:font typeface="Rockwell Bold" panose="02060503020205020403" charset="0"/>
-      <p:regular r:id="rId49"/>
+      <p:regular r:id="rId55"/>
     </p:embeddedFont>
   </p:embeddedFontLst>
   <p:defaultTextStyle>
@@ -10103,56 +10109,26 @@
       </p:sp>
       <p:pic>
         <p:nvPicPr>
-          <p:cNvPr id="5" name="Picture 4" descr="8"/>
+          <p:cNvPr id="7" name="Picture 6" descr="pagining"/>
           <p:cNvPicPr>
-            <a:picLocks noChangeAspect="1" noChangeArrowheads="1"/>
+            <a:picLocks noChangeAspect="1"/>
           </p:cNvPicPr>
           <p:nvPr/>
         </p:nvPicPr>
         <p:blipFill>
-          <a:blip r:embed="rId1">
-            <a:extLst>
-              <a:ext uri="{28A0092B-C50C-407E-A947-70E740481C1C}">
-                <a14:useLocalDpi xmlns:a14="http://schemas.microsoft.com/office/drawing/2010/main" val="0"/>
-              </a:ext>
-            </a:extLst>
-          </a:blip>
-          <a:srcRect/>
+          <a:blip r:embed="rId1"/>
           <a:stretch>
             <a:fillRect/>
           </a:stretch>
         </p:blipFill>
-        <p:spPr bwMode="auto">
+        <p:spPr>
           <a:xfrm>
-            <a:off x="1927225" y="1943100"/>
-            <a:ext cx="9201023" cy="4300538"/>
+            <a:off x="1692910" y="1604010"/>
+            <a:ext cx="7377430" cy="5292725"/>
           </a:xfrm>
           <a:prstGeom prst="rect">
             <a:avLst/>
           </a:prstGeom>
-          <a:noFill/>
-          <a:ln>
-            <a:noFill/>
-          </a:ln>
-          <a:extLst>
-            <a:ext uri="{909E8E84-426E-40DD-AFC4-6F175D3DCCD1}">
-              <a14:hiddenFill xmlns:a14="http://schemas.microsoft.com/office/drawing/2010/main">
-                <a:solidFill>
-                  <a:srgbClr val="FFFFFF"/>
-                </a:solidFill>
-              </a14:hiddenFill>
-            </a:ext>
-            <a:ext uri="{91240B29-F687-4F45-9708-019B960494DF}">
-              <a14:hiddenLine xmlns:a14="http://schemas.microsoft.com/office/drawing/2010/main" w="9525">
-                <a:solidFill>
-                  <a:srgbClr val="000000"/>
-                </a:solidFill>
-                <a:miter lim="800000"/>
-                <a:headEnd/>
-                <a:tailEnd/>
-              </a14:hiddenLine>
-            </a:ext>
-          </a:extLst>
         </p:spPr>
       </p:pic>
     </p:spTree>
@@ -10172,6 +10148,160 @@
         <p:cNvGrpSpPr/>
         <p:nvPr/>
       </p:nvGrpSpPr>
+      <p:grpSpPr/>
+      <p:sp>
+        <p:nvSpPr>
+          <p:cNvPr id="4" name="Text Box 3"/>
+          <p:cNvSpPr txBox="1"/>
+          <p:nvPr/>
+        </p:nvSpPr>
+        <p:spPr>
+          <a:xfrm>
+            <a:off x="724535" y="569595"/>
+            <a:ext cx="10547985" cy="5077460"/>
+          </a:xfrm>
+          <a:prstGeom prst="rect">
+            <a:avLst/>
+          </a:prstGeom>
+        </p:spPr>
+        <p:txBody>
+          <a:bodyPr wrap="square">
+            <a:spAutoFit/>
+          </a:bodyPr>
+          <a:p>
+            <a:r>
+              <a:t>Suppose:</a:t>
+            </a:r>
+          </a:p>
+          <a:p/>
+          <a:p>
+            <a:pPr>
+              <a:buFont typeface="Arial" panose="020B0604020202090204"/>
+              <a:buChar char="•"/>
+            </a:pPr>
+            <a:r>
+              <a:t>Page size = 1 KB</a:t>
+            </a:r>
+          </a:p>
+          <a:p>
+            <a:pPr>
+              <a:buFont typeface="Arial" panose="020B0604020202090204"/>
+              <a:buChar char="•"/>
+            </a:pPr>
+            <a:r>
+              <a:t>Logical address = 2500</a:t>
+            </a:r>
+          </a:p>
+          <a:p>
+            <a:pPr>
+              <a:buFont typeface="Arial" panose="020B0604020202090204"/>
+              <a:buChar char="•"/>
+            </a:pPr>
+            <a:r>
+              <a:t>Page 2 is stored in frame 5</a:t>
+            </a:r>
+          </a:p>
+          <a:p>
+            <a:pPr>
+              <a:buFont typeface="Arial" panose="020B0604020202090204"/>
+              <a:buChar char="•"/>
+            </a:pPr>
+            <a:r>
+              <a:t>Each address refers to one byte, and pages are numbered from 0.</a:t>
+            </a:r>
+          </a:p>
+          <a:p>
+            <a:pPr>
+              <a:buFont typeface="Arial" panose="020B0604020202090204"/>
+              <a:buChar char="•"/>
+            </a:pPr>
+          </a:p>
+          <a:p>
+            <a:r>
+              <a:t>First, divide the logical address by the page size.</a:t>
+            </a:r>
+          </a:p>
+          <a:p>
+            <a:r>
+              <a:t>p=</a:t>
+            </a:r>
+            <a:r>
+              <a:rPr lang="en-US"/>
+              <a:t>(</a:t>
+            </a:r>
+            <a:r>
+              <a:t>2500/1024</a:t>
+            </a:r>
+            <a:r>
+              <a:rPr lang="en-US"/>
+              <a:t>)</a:t>
+            </a:r>
+            <a:r>
+              <a:t>=2</a:t>
+            </a:r>
+          </a:p>
+          <a:p>
+            <a:r>
+              <a:t>d=2500-(2</a:t>
+            </a:r>
+            <a:r>
+              <a:rPr lang="en-US"/>
+              <a:t> x 1024</a:t>
+            </a:r>
+            <a:r>
+              <a:t>)=452</a:t>
+            </a:r>
+          </a:p>
+          <a:p/>
+          <a:p>
+            <a:r>
+              <a:t>So the logical address is (page 2, offset 452).</a:t>
+            </a:r>
+          </a:p>
+          <a:p/>
+          <a:p>
+            <a:r>
+              <a:t>The page table tells us that page 2 is stored in frame 5. Therefore:</a:t>
+            </a:r>
+          </a:p>
+          <a:p/>
+          <a:p>
+            <a:r>
+              <a:t>Physical address=(5</a:t>
+            </a:r>
+            <a:r>
+              <a:rPr lang="en-US"/>
+              <a:t> x </a:t>
+            </a:r>
+            <a:r>
+              <a:t>1024)+452</a:t>
+            </a:r>
+          </a:p>
+          <a:p/>
+          <a:p>
+            <a:r>
+              <a:t>The physical address is 5572.</a:t>
+            </a:r>
+          </a:p>
+        </p:txBody>
+      </p:sp>
+    </p:spTree>
+  </p:cSld>
+  <p:clrMapOvr>
+    <a:masterClrMapping/>
+  </p:clrMapOvr>
+</p:sld>
+</file>
+
+<file path=ppt/slides/slide26.xml><?xml version="1.0" encoding="utf-8"?>
+<p:sld xmlns:a="http://schemas.openxmlformats.org/drawingml/2006/main" xmlns:r="http://schemas.openxmlformats.org/officeDocument/2006/relationships" xmlns:p="http://schemas.openxmlformats.org/presentationml/2006/main" show="0">
+  <p:cSld>
+    <p:spTree>
+      <p:nvGrpSpPr>
+        <p:cNvPr id="1" name=""/>
+        <p:cNvGrpSpPr/>
+        <p:nvPr/>
+      </p:nvGrpSpPr>
       <p:grpSpPr>
         <a:xfrm>
           <a:off x="0" y="0"/>
@@ -10291,8 +10421,8 @@
         </p:blipFill>
         <p:spPr>
           <a:xfrm>
-            <a:off x="1275251" y="1566208"/>
-            <a:ext cx="9154623" cy="4477405"/>
+            <a:off x="1275080" y="1578610"/>
+            <a:ext cx="7713345" cy="4477385"/>
           </a:xfrm>
           <a:prstGeom prst="rect">
             <a:avLst/>
@@ -10328,229 +10458,7 @@
   <p:clrMapOvr>
     <a:masterClrMapping/>
   </p:clrMapOvr>
-</p:sld>
-</file>
-
-<file path=ppt/slides/slide26.xml><?xml version="1.0" encoding="utf-8"?>
-<p:sld xmlns:a="http://schemas.openxmlformats.org/drawingml/2006/main" xmlns:r="http://schemas.openxmlformats.org/officeDocument/2006/relationships" xmlns:p="http://schemas.openxmlformats.org/presentationml/2006/main">
-  <p:cSld>
-    <p:spTree>
-      <p:nvGrpSpPr>
-        <p:cNvPr id="1" name=""/>
-        <p:cNvGrpSpPr/>
-        <p:nvPr/>
-      </p:nvGrpSpPr>
-      <p:grpSpPr>
-        <a:xfrm>
-          <a:off x="0" y="0"/>
-          <a:ext cx="0" cy="0"/>
-          <a:chOff x="0" y="0"/>
-          <a:chExt cx="0" cy="0"/>
-        </a:xfrm>
-      </p:grpSpPr>
-      <p:sp>
-        <p:nvSpPr>
-          <p:cNvPr id="2" name="Title 1"/>
-          <p:cNvSpPr>
-            <a:spLocks noGrp="1"/>
-          </p:cNvSpPr>
-          <p:nvPr>
-            <p:ph type="title"/>
-          </p:nvPr>
-        </p:nvSpPr>
-        <p:spPr>
-          <a:xfrm>
-            <a:off x="1069848" y="484632"/>
-            <a:ext cx="10058400" cy="558356"/>
-          </a:xfrm>
-        </p:spPr>
-        <p:txBody>
-          <a:bodyPr>
-            <a:normAutofit fontScale="90000"/>
-          </a:bodyPr>
-          <a:lstStyle/>
-          <a:p>
-            <a:r>
-              <a:rPr lang="en-IN" dirty="0"/>
-              <a:t>MemORY MANAGEMENT</a:t>
-            </a:r>
-            <a:endParaRPr lang="en-IN" dirty="0"/>
-          </a:p>
-        </p:txBody>
-      </p:sp>
-      <p:sp>
-        <p:nvSpPr>
-          <p:cNvPr id="4" name="AutoShape 2" descr="PAGING&#10;MEMORY MANAGEMENT                                       New Concept!!&#10;&#10;&#10;•   Logical address space of a process can be noncontiguous; process is&#10;    allocated physical memory whenever that memory is available and the&#10;    program needs it.&#10;•   Divide physical memory into fixed-sized blocks called frames (size is&#10;    power of 2, between 512 bytes and 8192 bytes).&#10;•   Divide logical memory into blocks of same size called pages.&#10;•   Keep track of all free frames.&#10;•   To run a program of size n pages, need to find n free frames and load&#10;    program.&#10;•   Set up a page table to translate logical to physical addresses.&#10;•   Internal fragmentation.&#10;&#10;&#10;&#10;                            8: Memory Management                     20&#10; "/>
-          <p:cNvSpPr>
-            <a:spLocks noChangeAspect="1" noChangeArrowheads="1"/>
-          </p:cNvSpPr>
-          <p:nvPr/>
-        </p:nvSpPr>
-        <p:spPr bwMode="auto">
-          <a:xfrm>
-            <a:off x="5943600" y="3276600"/>
-            <a:ext cx="304800" cy="304800"/>
-          </a:xfrm>
-          <a:prstGeom prst="rect">
-            <a:avLst/>
-          </a:prstGeom>
-          <a:noFill/>
-          <a:extLst>
-            <a:ext uri="{909E8E84-426E-40DD-AFC4-6F175D3DCCD1}">
-              <a14:hiddenFill xmlns:a14="http://schemas.microsoft.com/office/drawing/2010/main">
-                <a:solidFill>
-                  <a:srgbClr val="FFFFFF"/>
-                </a:solidFill>
-              </a14:hiddenFill>
-            </a:ext>
-          </a:extLst>
-        </p:spPr>
-        <p:txBody>
-          <a:bodyPr vert="horz" wrap="square" lIns="91440" tIns="45720" rIns="91440" bIns="45720" numCol="1" anchor="t" anchorCtr="0" compatLnSpc="1"/>
-          <a:lstStyle/>
-          <a:p>
-            <a:endParaRPr lang="en-IN"/>
-          </a:p>
-        </p:txBody>
-      </p:sp>
-      <p:sp>
-        <p:nvSpPr>
-          <p:cNvPr id="6" name="TextBox 5"/>
-          <p:cNvSpPr txBox="1"/>
-          <p:nvPr/>
-        </p:nvSpPr>
-        <p:spPr>
-          <a:xfrm>
-            <a:off x="800100" y="1042988"/>
-            <a:ext cx="9629775" cy="523220"/>
-          </a:xfrm>
-          <a:prstGeom prst="rect">
-            <a:avLst/>
-          </a:prstGeom>
-          <a:noFill/>
-        </p:spPr>
-        <p:txBody>
-          <a:bodyPr wrap="square" rtlCol="0">
-            <a:spAutoFit/>
-          </a:bodyPr>
-          <a:lstStyle/>
-          <a:p>
-            <a:r>
-              <a:rPr lang="en-IN" sz="2800" b="1" dirty="0"/>
-              <a:t>   PAGING EXAMPLE </a:t>
-            </a:r>
-            <a:endParaRPr lang="en-IN" sz="2800" b="1" dirty="0"/>
-          </a:p>
-        </p:txBody>
-      </p:sp>
-      <p:sp>
-        <p:nvSpPr>
-          <p:cNvPr id="5" name="TextBox 4"/>
-          <p:cNvSpPr txBox="1"/>
-          <p:nvPr/>
-        </p:nvSpPr>
-        <p:spPr>
-          <a:xfrm>
-            <a:off x="1069848" y="1743075"/>
-            <a:ext cx="10174415" cy="3416320"/>
-          </a:xfrm>
-          <a:prstGeom prst="rect">
-            <a:avLst/>
-          </a:prstGeom>
-          <a:noFill/>
-        </p:spPr>
-        <p:txBody>
-          <a:bodyPr wrap="square" rtlCol="0">
-            <a:spAutoFit/>
-          </a:bodyPr>
-          <a:lstStyle/>
-          <a:p>
-            <a:r>
-              <a:rPr lang="en-IN" dirty="0"/>
-              <a:t>QUESTION: </a:t>
-            </a:r>
-            <a:endParaRPr lang="en-IN" dirty="0"/>
-          </a:p>
-          <a:p>
-            <a:endParaRPr lang="en-IN" dirty="0"/>
-          </a:p>
-          <a:p>
-            <a:r>
-              <a:rPr lang="en-IN" dirty="0"/>
-              <a:t>LOGICAL ADDRESS SPACE (LAS) is 128KB, PHYSICAL ADDRESS SPACE (PAS) is 512KB and PAGE SIZE is 16KB [Byte addressable]</a:t>
-            </a:r>
-            <a:endParaRPr lang="en-IN" dirty="0"/>
-          </a:p>
-          <a:p>
-            <a:endParaRPr lang="en-IN" dirty="0"/>
-          </a:p>
-          <a:p>
-            <a:r>
-              <a:rPr lang="en-IN" dirty="0"/>
-              <a:t>CALCULATE FOLLOWING:</a:t>
-            </a:r>
-            <a:endParaRPr lang="en-IN" dirty="0"/>
-          </a:p>
-          <a:p>
-            <a:endParaRPr lang="en-IN" dirty="0"/>
-          </a:p>
-          <a:p>
-            <a:pPr marL="342900" indent="-342900">
-              <a:buAutoNum type="alphaLcParenR"/>
-            </a:pPr>
-            <a:r>
-              <a:rPr lang="en-IN" dirty="0"/>
-              <a:t>Number of Bits of Logical Address (LA)</a:t>
-            </a:r>
-            <a:endParaRPr lang="en-IN" dirty="0"/>
-          </a:p>
-          <a:p>
-            <a:pPr marL="342900" indent="-342900">
-              <a:buAutoNum type="alphaLcParenR"/>
-            </a:pPr>
-            <a:r>
-              <a:rPr lang="en-IN" dirty="0"/>
-              <a:t>Number of Bits of Physical Address (PA)</a:t>
-            </a:r>
-            <a:endParaRPr lang="en-IN" dirty="0"/>
-          </a:p>
-          <a:p>
-            <a:pPr marL="342900" indent="-342900">
-              <a:buAutoNum type="alphaLcParenR"/>
-            </a:pPr>
-            <a:r>
-              <a:rPr lang="en-IN" dirty="0"/>
-              <a:t>Number of pages in process (LAS)</a:t>
-            </a:r>
-            <a:endParaRPr lang="en-IN" dirty="0"/>
-          </a:p>
-          <a:p>
-            <a:pPr marL="342900" indent="-342900">
-              <a:buAutoNum type="alphaLcParenR"/>
-            </a:pPr>
-            <a:r>
-              <a:rPr lang="en-IN" dirty="0"/>
-              <a:t>Number of Frames in memory (PAS)</a:t>
-            </a:r>
-            <a:endParaRPr lang="en-IN" dirty="0"/>
-          </a:p>
-          <a:p>
-            <a:pPr marL="342900" indent="-342900">
-              <a:buAutoNum type="alphaLcParenR"/>
-            </a:pPr>
-            <a:r>
-              <a:rPr lang="en-IN" dirty="0"/>
-              <a:t>Page Table Size</a:t>
-            </a:r>
-            <a:endParaRPr lang="en-IN" dirty="0"/>
-          </a:p>
-        </p:txBody>
-      </p:sp>
-    </p:spTree>
-  </p:cSld>
-  <p:clrMapOvr>
-    <a:masterClrMapping/>
-  </p:clrMapOvr>
+  <p:transition/>
 </p:sld>
 </file>
 
@@ -10675,7 +10583,7 @@
         <p:spPr>
           <a:xfrm>
             <a:off x="1069848" y="1743075"/>
-            <a:ext cx="10174415" cy="5078313"/>
+            <a:ext cx="10174415" cy="3416320"/>
           </a:xfrm>
           <a:prstGeom prst="rect">
             <a:avLst/>
@@ -10690,7 +10598,27 @@
           <a:p>
             <a:r>
               <a:rPr lang="en-IN" dirty="0"/>
-              <a:t>SOLUTION:</a:t>
+              <a:t>QUESTION: </a:t>
+            </a:r>
+            <a:endParaRPr lang="en-IN" dirty="0"/>
+          </a:p>
+          <a:p>
+            <a:endParaRPr lang="en-IN" dirty="0"/>
+          </a:p>
+          <a:p>
+            <a:r>
+              <a:rPr lang="en-IN" dirty="0"/>
+              <a:t>LOGICAL ADDRESS SPACE (LAS) is 128KB, PHYSICAL ADDRESS SPACE (PAS) is 512KB and PAGE SIZE is 16KB [Byte addressable]</a:t>
+            </a:r>
+            <a:endParaRPr lang="en-IN" dirty="0"/>
+          </a:p>
+          <a:p>
+            <a:endParaRPr lang="en-IN" dirty="0"/>
+          </a:p>
+          <a:p>
+            <a:r>
+              <a:rPr lang="en-IN" dirty="0"/>
+              <a:t>CALCULATE FOLLOWING:</a:t>
             </a:r>
             <a:endParaRPr lang="en-IN" dirty="0"/>
           </a:p>
@@ -10708,123 +10636,42 @@
             <a:endParaRPr lang="en-IN" dirty="0"/>
           </a:p>
           <a:p>
+            <a:pPr marL="342900" indent="-342900">
+              <a:buAutoNum type="alphaLcParenR"/>
+            </a:pPr>
             <a:r>
               <a:rPr lang="en-IN" dirty="0"/>
-              <a:t>         128KB = 2</a:t>
-            </a:r>
-            <a:r>
-              <a:rPr lang="en-IN" baseline="30000" dirty="0"/>
-              <a:t>17 </a:t>
-            </a:r>
+              <a:t>Number of Bits of Physical Address (PA)</a:t>
+            </a:r>
+            <a:endParaRPr lang="en-IN" dirty="0"/>
+          </a:p>
+          <a:p>
+            <a:pPr marL="342900" indent="-342900">
+              <a:buAutoNum type="alphaLcParenR"/>
+            </a:pPr>
             <a:r>
               <a:rPr lang="en-IN" dirty="0"/>
-              <a:t>Bytes              17 bits will be required for LA</a:t>
-            </a:r>
-            <a:endParaRPr lang="en-IN" baseline="30000" dirty="0"/>
-          </a:p>
-          <a:p>
+              <a:t>Number of pages in process (LAS)</a:t>
+            </a:r>
+            <a:endParaRPr lang="en-IN" dirty="0"/>
+          </a:p>
+          <a:p>
+            <a:pPr marL="342900" indent="-342900">
+              <a:buAutoNum type="alphaLcParenR"/>
+            </a:pPr>
             <a:r>
               <a:rPr lang="en-IN" dirty="0"/>
-              <a:t>     </a:t>
+              <a:t>Number of Frames in memory (PAS)</a:t>
             </a:r>
             <a:endParaRPr lang="en-IN" dirty="0"/>
           </a:p>
           <a:p>
+            <a:pPr marL="342900" indent="-342900">
+              <a:buAutoNum type="alphaLcParenR"/>
+            </a:pPr>
             <a:r>
               <a:rPr lang="en-IN" dirty="0"/>
-              <a:t>b) Number of Bits of Physical Address (PA)</a:t>
-            </a:r>
-            <a:endParaRPr lang="en-IN" dirty="0"/>
-          </a:p>
-          <a:p>
-            <a:r>
-              <a:rPr lang="en-IN" dirty="0"/>
-              <a:t>          512KB = 2</a:t>
-            </a:r>
-            <a:r>
-              <a:rPr lang="en-IN" baseline="30000" dirty="0"/>
-              <a:t>19</a:t>
-            </a:r>
-            <a:r>
-              <a:rPr lang="en-IN" dirty="0"/>
-              <a:t> Bytes             19 bits will be required for PA</a:t>
-            </a:r>
-            <a:endParaRPr lang="en-IN" dirty="0"/>
-          </a:p>
-          <a:p>
-            <a:endParaRPr lang="en-IN" dirty="0"/>
-          </a:p>
-          <a:p>
-            <a:r>
-              <a:rPr lang="en-IN" dirty="0"/>
-              <a:t>c) Number of pages in process (LAS)</a:t>
-            </a:r>
-            <a:endParaRPr lang="en-IN" dirty="0"/>
-          </a:p>
-          <a:p>
-            <a:r>
-              <a:rPr lang="en-IN" dirty="0"/>
-              <a:t>         16KB  = 2</a:t>
-            </a:r>
-            <a:r>
-              <a:rPr lang="en-IN" baseline="30000" dirty="0"/>
-              <a:t>14</a:t>
-            </a:r>
-            <a:r>
-              <a:rPr lang="en-IN" dirty="0"/>
-              <a:t> Bytes         formula= LAS/Page Size     8 pages</a:t>
-            </a:r>
-            <a:endParaRPr lang="en-IN" dirty="0"/>
-          </a:p>
-          <a:p>
-            <a:endParaRPr lang="en-IN" dirty="0"/>
-          </a:p>
-          <a:p>
-            <a:r>
-              <a:rPr lang="en-IN" dirty="0"/>
-              <a:t>d) Number of Frames in memory (PAS)</a:t>
-            </a:r>
-            <a:endParaRPr lang="en-IN" dirty="0"/>
-          </a:p>
-          <a:p>
-            <a:r>
-              <a:rPr lang="en-IN" dirty="0"/>
-              <a:t>      Page size = Frame size   formula = PAS/Frame Size    32 Frames</a:t>
-            </a:r>
-            <a:endParaRPr lang="en-IN" dirty="0"/>
-          </a:p>
-          <a:p>
-            <a:r>
-              <a:rPr lang="en-IN" dirty="0"/>
-              <a:t>    </a:t>
-            </a:r>
-            <a:endParaRPr lang="en-IN" dirty="0"/>
-          </a:p>
-          <a:p>
-            <a:r>
-              <a:rPr lang="en-IN" dirty="0"/>
-              <a:t>e) Page Table Size</a:t>
-            </a:r>
-            <a:endParaRPr lang="en-IN" dirty="0"/>
-          </a:p>
-          <a:p>
-            <a:r>
-              <a:rPr lang="en-IN" dirty="0"/>
-              <a:t>        formula = No of Pages * Page entry size</a:t>
-            </a:r>
-            <a:endParaRPr lang="en-IN" dirty="0"/>
-          </a:p>
-          <a:p>
-            <a:r>
-              <a:rPr lang="en-IN" dirty="0"/>
-              <a:t>                        =    8 * 5</a:t>
-            </a:r>
-            <a:endParaRPr lang="en-IN" dirty="0"/>
-          </a:p>
-          <a:p>
-            <a:r>
-              <a:rPr lang="en-IN" dirty="0"/>
-              <a:t>                        = 40 bits</a:t>
+              <a:t>Page Table Size</a:t>
             </a:r>
             <a:endParaRPr lang="en-IN" dirty="0"/>
           </a:p>
@@ -10952,14 +10799,14 @@
       </p:sp>
       <p:sp>
         <p:nvSpPr>
-          <p:cNvPr id="7" name="TextBox 6"/>
+          <p:cNvPr id="5" name="TextBox 4"/>
           <p:cNvSpPr txBox="1"/>
           <p:nvPr/>
         </p:nvSpPr>
         <p:spPr>
           <a:xfrm>
-            <a:off x="975455" y="1799272"/>
-            <a:ext cx="10545890" cy="3139321"/>
+            <a:off x="1069848" y="1743075"/>
+            <a:ext cx="10174415" cy="5077460"/>
           </a:xfrm>
           <a:prstGeom prst="rect">
             <a:avLst/>
@@ -10967,70 +10814,178 @@
           <a:noFill/>
         </p:spPr>
         <p:txBody>
-          <a:bodyPr wrap="square">
+          <a:bodyPr wrap="square" rtlCol="0">
             <a:spAutoFit/>
           </a:bodyPr>
           <a:lstStyle/>
           <a:p>
             <a:r>
-              <a:rPr lang="en-US" b="1" dirty="0"/>
-              <a:t>Assignment Question I:</a:t>
-            </a:r>
-            <a:endParaRPr lang="en-US" b="1" dirty="0"/>
-          </a:p>
-          <a:p>
-            <a:endParaRPr lang="en-US" dirty="0"/>
-          </a:p>
-          <a:p>
-            <a:r>
-              <a:rPr lang="en-US" b="1" dirty="0"/>
-              <a:t>GIVEN DATA :</a:t>
-            </a:r>
-            <a:endParaRPr lang="en-US" b="1" dirty="0"/>
-          </a:p>
-          <a:p>
-            <a:endParaRPr lang="en-US" dirty="0"/>
-          </a:p>
-          <a:p>
-            <a:r>
-              <a:rPr lang="en-US" dirty="0"/>
-              <a:t>64 MB physical memory</a:t>
-            </a:r>
-            <a:endParaRPr lang="en-US" dirty="0"/>
-          </a:p>
-          <a:p>
-            <a:r>
-              <a:rPr lang="en-US" dirty="0"/>
-              <a:t>32 bit virtual address space. </a:t>
-            </a:r>
-            <a:endParaRPr lang="en-US" dirty="0"/>
-          </a:p>
-          <a:p>
-            <a:r>
-              <a:rPr lang="en-US" dirty="0"/>
-              <a:t>page size is 4 KB </a:t>
-            </a:r>
-            <a:endParaRPr lang="en-US" dirty="0"/>
-          </a:p>
-          <a:p>
-            <a:endParaRPr lang="en-US" dirty="0"/>
-          </a:p>
-          <a:p>
-            <a:r>
-              <a:rPr lang="en-US" dirty="0"/>
-              <a:t>Consider the memory as byte addressable.</a:t>
-            </a:r>
-            <a:endParaRPr lang="en-US" dirty="0"/>
-          </a:p>
-          <a:p>
-            <a:endParaRPr lang="en-US" dirty="0"/>
-          </a:p>
-          <a:p>
-            <a:r>
-              <a:rPr lang="en-US" dirty="0"/>
-              <a:t>what is the approximate size of the page table?</a:t>
+              <a:rPr lang="en-IN" dirty="0"/>
+              <a:t>SOLUTION:</a:t>
             </a:r>
             <a:endParaRPr lang="en-IN" dirty="0"/>
+          </a:p>
+          <a:p>
+            <a:endParaRPr lang="en-IN" dirty="0"/>
+          </a:p>
+          <a:p>
+            <a:pPr marL="342900" indent="-342900">
+              <a:buAutoNum type="alphaLcParenR"/>
+            </a:pPr>
+            <a:r>
+              <a:rPr lang="en-IN" dirty="0"/>
+              <a:t>Number of Bits of Logical Address (LA)</a:t>
+            </a:r>
+            <a:endParaRPr lang="en-IN" dirty="0"/>
+          </a:p>
+          <a:p>
+            <a:r>
+              <a:rPr lang="en-IN" dirty="0"/>
+              <a:t>         128KB =</a:t>
+            </a:r>
+            <a:r>
+              <a:rPr lang="en-US" altLang="en-IN" dirty="0"/>
+              <a:t>128*1024=131072=</a:t>
+            </a:r>
+            <a:r>
+              <a:rPr lang="en-IN" dirty="0"/>
+              <a:t> 2</a:t>
+            </a:r>
+            <a:r>
+              <a:rPr lang="en-IN" baseline="30000" dirty="0"/>
+              <a:t>17 </a:t>
+            </a:r>
+            <a:r>
+              <a:rPr lang="en-IN" dirty="0"/>
+              <a:t>Bytes              17 bits will be required for LA</a:t>
+            </a:r>
+            <a:endParaRPr lang="en-IN" baseline="30000" dirty="0"/>
+          </a:p>
+          <a:p>
+            <a:r>
+              <a:rPr lang="en-IN" dirty="0"/>
+              <a:t>     </a:t>
+            </a:r>
+            <a:endParaRPr lang="en-IN" dirty="0"/>
+          </a:p>
+          <a:p>
+            <a:r>
+              <a:rPr lang="en-IN" dirty="0"/>
+              <a:t>b) Number of Bits of Physical Address (PA)</a:t>
+            </a:r>
+            <a:endParaRPr lang="en-IN" dirty="0"/>
+          </a:p>
+          <a:p>
+            <a:r>
+              <a:rPr lang="en-IN" dirty="0"/>
+              <a:t>          512KB =</a:t>
+            </a:r>
+            <a:r>
+              <a:rPr lang="en-US" altLang="en-IN" dirty="0"/>
+              <a:t>512*1024=524288=</a:t>
+            </a:r>
+            <a:r>
+              <a:rPr lang="en-IN" dirty="0"/>
+              <a:t> 2</a:t>
+            </a:r>
+            <a:r>
+              <a:rPr lang="en-IN" baseline="30000" dirty="0"/>
+              <a:t>19</a:t>
+            </a:r>
+            <a:r>
+              <a:rPr lang="en-IN" dirty="0"/>
+              <a:t> Bytes             19 bits will be required for PA</a:t>
+            </a:r>
+            <a:endParaRPr lang="en-IN" dirty="0"/>
+          </a:p>
+          <a:p>
+            <a:endParaRPr lang="en-IN" dirty="0"/>
+          </a:p>
+          <a:p>
+            <a:r>
+              <a:rPr lang="en-IN" dirty="0"/>
+              <a:t>c) Number of pages in process (LAS)</a:t>
+            </a:r>
+            <a:endParaRPr lang="en-IN" dirty="0"/>
+          </a:p>
+          <a:p>
+            <a:r>
+              <a:rPr lang="en-IN" dirty="0"/>
+              <a:t>         </a:t>
+            </a:r>
+            <a:r>
+              <a:rPr lang="en-US" altLang="en-IN" dirty="0"/>
+              <a:t>128KB/16KB =8 Pages</a:t>
+            </a:r>
+            <a:r>
+              <a:rPr lang="en-IN" dirty="0"/>
+              <a:t>       formula= LAS/Page Size     8 pages</a:t>
+            </a:r>
+            <a:endParaRPr lang="en-IN" dirty="0"/>
+          </a:p>
+          <a:p>
+            <a:endParaRPr lang="en-IN" dirty="0"/>
+          </a:p>
+          <a:p>
+            <a:r>
+              <a:rPr lang="en-IN" dirty="0"/>
+              <a:t>d) Number of Frames in memory (PAS)</a:t>
+            </a:r>
+            <a:endParaRPr lang="en-IN" dirty="0"/>
+          </a:p>
+          <a:p>
+            <a:r>
+              <a:rPr lang="en-IN" dirty="0"/>
+              <a:t>      Page size = Frame size   formula = PAS/Frame Size    </a:t>
+            </a:r>
+            <a:r>
+              <a:rPr lang="en-US" altLang="en-IN" dirty="0"/>
+              <a:t>512/16=32 frames</a:t>
+            </a:r>
+            <a:endParaRPr lang="en-IN" dirty="0"/>
+          </a:p>
+          <a:p>
+            <a:r>
+              <a:rPr lang="en-IN" dirty="0"/>
+              <a:t>    </a:t>
+            </a:r>
+            <a:endParaRPr lang="en-IN" dirty="0"/>
+          </a:p>
+          <a:p>
+            <a:r>
+              <a:rPr lang="en-IN" dirty="0"/>
+              <a:t>e) Page Table Size</a:t>
+            </a:r>
+            <a:endParaRPr lang="en-IN" dirty="0"/>
+          </a:p>
+          <a:p>
+            <a:r>
+              <a:rPr lang="en-IN" dirty="0"/>
+              <a:t>        formula = No of Pages * Page entry size</a:t>
+            </a:r>
+            <a:r>
+              <a:rPr lang="en-US" altLang="en-IN" dirty="0"/>
+              <a:t> (log (32)) to identify the 32 frames</a:t>
+            </a:r>
+            <a:endParaRPr lang="en-IN" dirty="0"/>
+          </a:p>
+          <a:p>
+            <a:r>
+              <a:rPr lang="en-IN" dirty="0"/>
+              <a:t>                        =    8 * 5</a:t>
+            </a:r>
+            <a:endParaRPr lang="en-IN" dirty="0"/>
+          </a:p>
+          <a:p>
+            <a:r>
+              <a:rPr lang="en-IN" dirty="0"/>
+              <a:t>                        = 40 bits</a:t>
+            </a:r>
+            <a:r>
+              <a:rPr lang="en-US" altLang="en-IN" dirty="0"/>
+              <a:t> or 5 bytes(40/8)</a:t>
+            </a:r>
+            <a:endParaRPr lang="en-US" altLang="en-IN" dirty="0"/>
           </a:p>
         </p:txBody>
       </p:sp>
@@ -11163,7 +11118,7 @@
         <p:spPr>
           <a:xfrm>
             <a:off x="975455" y="1799272"/>
-            <a:ext cx="10545890" cy="2862322"/>
+            <a:ext cx="10545890" cy="3139321"/>
           </a:xfrm>
           <a:prstGeom prst="rect">
             <a:avLst/>
@@ -11178,7 +11133,7 @@
           <a:p>
             <a:r>
               <a:rPr lang="en-US" b="1" dirty="0"/>
-              <a:t>Assignment Question II:</a:t>
+              <a:t>Assignment Question I:</a:t>
             </a:r>
             <a:endParaRPr lang="en-US" b="1" dirty="0"/>
           </a:p>
@@ -11197,29 +11152,24 @@
           </a:p>
           <a:p>
             <a:r>
-              <a:rPr lang="en-US" altLang="en-US" dirty="0"/>
-              <a:t>Calculating internal fragmentation</a:t>
-            </a:r>
-            <a:endParaRPr lang="en-US" altLang="en-US" dirty="0"/>
-          </a:p>
-          <a:p>
-            <a:endParaRPr lang="en-US" altLang="en-US" dirty="0"/>
-          </a:p>
-          <a:p>
-            <a:pPr lvl="1"/>
-            <a:r>
-              <a:rPr lang="en-US" altLang="en-US" dirty="0"/>
-              <a:t>Page size = 2,048 bytes</a:t>
-            </a:r>
-            <a:endParaRPr lang="en-US" altLang="en-US" dirty="0"/>
-          </a:p>
-          <a:p>
-            <a:pPr lvl="1"/>
-            <a:r>
-              <a:rPr lang="en-US" altLang="en-US" dirty="0"/>
-              <a:t>Process size = 72,766 bytes</a:t>
-            </a:r>
-            <a:endParaRPr lang="en-US" altLang="en-US" dirty="0"/>
+              <a:rPr lang="en-US" dirty="0"/>
+              <a:t>64 MB physical memory</a:t>
+            </a:r>
+            <a:endParaRPr lang="en-US" dirty="0"/>
+          </a:p>
+          <a:p>
+            <a:r>
+              <a:rPr lang="en-US" dirty="0"/>
+              <a:t>32 bit virtual address space. </a:t>
+            </a:r>
+            <a:endParaRPr lang="en-US" dirty="0"/>
+          </a:p>
+          <a:p>
+            <a:r>
+              <a:rPr lang="en-US" dirty="0"/>
+              <a:t>page size is 4 KB </a:t>
+            </a:r>
+            <a:endParaRPr lang="en-US" dirty="0"/>
           </a:p>
           <a:p>
             <a:endParaRPr lang="en-US" dirty="0"/>
@@ -11230,6 +11180,16 @@
               <a:t>Consider the memory as byte addressable.</a:t>
             </a:r>
             <a:endParaRPr lang="en-US" dirty="0"/>
+          </a:p>
+          <a:p>
+            <a:endParaRPr lang="en-US" dirty="0"/>
+          </a:p>
+          <a:p>
+            <a:r>
+              <a:rPr lang="en-US" dirty="0"/>
+              <a:t>what is the approximate size of the page table?</a:t>
+            </a:r>
+            <a:endParaRPr lang="en-IN" dirty="0"/>
           </a:p>
         </p:txBody>
       </p:sp>
@@ -11366,161 +11326,184 @@
         <p:cNvGrpSpPr/>
         <p:nvPr/>
       </p:nvGrpSpPr>
-      <p:grpSpPr>
-        <a:xfrm>
-          <a:off x="0" y="0"/>
-          <a:ext cx="0" cy="0"/>
-          <a:chOff x="0" y="0"/>
-          <a:chExt cx="0" cy="0"/>
-        </a:xfrm>
-      </p:grpSpPr>
-      <p:sp>
-        <p:nvSpPr>
-          <p:cNvPr id="2" name="Title 1"/>
-          <p:cNvSpPr>
-            <a:spLocks noGrp="1"/>
-          </p:cNvSpPr>
-          <p:nvPr>
-            <p:ph type="title"/>
-          </p:nvPr>
+      <p:grpSpPr/>
+      <p:sp>
+        <p:nvSpPr>
+          <p:cNvPr id="4" name="Text Box 3"/>
+          <p:cNvSpPr txBox="1"/>
+          <p:nvPr/>
         </p:nvSpPr>
         <p:spPr>
           <a:xfrm>
-            <a:off x="1069848" y="484632"/>
-            <a:ext cx="10058400" cy="558356"/>
-          </a:xfrm>
-        </p:spPr>
-        <p:txBody>
-          <a:bodyPr>
-            <a:normAutofit fontScale="90000"/>
-          </a:bodyPr>
-          <a:lstStyle/>
-          <a:p>
-            <a:r>
-              <a:rPr lang="en-IN" dirty="0"/>
-              <a:t>MemORY MANAGEMENT</a:t>
-            </a:r>
-            <a:endParaRPr lang="en-IN" dirty="0"/>
-          </a:p>
-        </p:txBody>
-      </p:sp>
-      <p:sp>
-        <p:nvSpPr>
-          <p:cNvPr id="4" name="AutoShape 2" descr="PAGING&#10;MEMORY MANAGEMENT                                       New Concept!!&#10;&#10;&#10;•   Logical address space of a process can be noncontiguous; process is&#10;    allocated physical memory whenever that memory is available and the&#10;    program needs it.&#10;•   Divide physical memory into fixed-sized blocks called frames (size is&#10;    power of 2, between 512 bytes and 8192 bytes).&#10;•   Divide logical memory into blocks of same size called pages.&#10;•   Keep track of all free frames.&#10;•   To run a program of size n pages, need to find n free frames and load&#10;    program.&#10;•   Set up a page table to translate logical to physical addresses.&#10;•   Internal fragmentation.&#10;&#10;&#10;&#10;                            8: Memory Management                     20&#10; "/>
-          <p:cNvSpPr>
-            <a:spLocks noChangeAspect="1" noChangeArrowheads="1"/>
-          </p:cNvSpPr>
-          <p:nvPr/>
-        </p:nvSpPr>
-        <p:spPr bwMode="auto">
-          <a:xfrm>
-            <a:off x="5943600" y="3276600"/>
-            <a:ext cx="304800" cy="304800"/>
+            <a:off x="1062355" y="918210"/>
+            <a:ext cx="9495790" cy="4910455"/>
           </a:xfrm>
           <a:prstGeom prst="rect">
             <a:avLst/>
           </a:prstGeom>
-          <a:noFill/>
-          <a:extLst>
-            <a:ext uri="{909E8E84-426E-40DD-AFC4-6F175D3DCCD1}">
-              <a14:hiddenFill xmlns:a14="http://schemas.microsoft.com/office/drawing/2010/main">
-                <a:solidFill>
-                  <a:srgbClr val="FFFFFF"/>
-                </a:solidFill>
-              </a14:hiddenFill>
-            </a:ext>
-          </a:extLst>
-        </p:spPr>
-        <p:txBody>
-          <a:bodyPr vert="horz" wrap="square" lIns="91440" tIns="45720" rIns="91440" bIns="45720" numCol="1" anchor="t" anchorCtr="0" compatLnSpc="1"/>
-          <a:lstStyle/>
-          <a:p>
-            <a:endParaRPr lang="en-IN"/>
-          </a:p>
-        </p:txBody>
-      </p:sp>
-      <p:sp>
-        <p:nvSpPr>
-          <p:cNvPr id="6" name="TextBox 5"/>
-          <p:cNvSpPr txBox="1"/>
-          <p:nvPr/>
-        </p:nvSpPr>
-        <p:spPr>
-          <a:xfrm>
-            <a:off x="800100" y="1042988"/>
-            <a:ext cx="9629775" cy="523220"/>
-          </a:xfrm>
-          <a:prstGeom prst="rect">
-            <a:avLst/>
-          </a:prstGeom>
-          <a:noFill/>
-        </p:spPr>
-        <p:txBody>
-          <a:bodyPr wrap="square" rtlCol="0">
-            <a:spAutoFit/>
-          </a:bodyPr>
-          <a:lstStyle/>
-          <a:p>
-            <a:r>
-              <a:rPr lang="en-IN" sz="2800" b="1" dirty="0"/>
-              <a:t>   PAGING EXAMPLE </a:t>
-            </a:r>
-            <a:endParaRPr lang="en-IN" sz="2800" b="1" dirty="0"/>
-          </a:p>
-        </p:txBody>
-      </p:sp>
-      <p:sp>
-        <p:nvSpPr>
-          <p:cNvPr id="7" name="TextBox 6"/>
-          <p:cNvSpPr txBox="1"/>
-          <p:nvPr/>
-        </p:nvSpPr>
-        <p:spPr>
-          <a:xfrm>
-            <a:off x="975455" y="1799272"/>
-            <a:ext cx="10545890" cy="1938992"/>
-          </a:xfrm>
-          <a:prstGeom prst="rect">
-            <a:avLst/>
-          </a:prstGeom>
-          <a:noFill/>
         </p:spPr>
         <p:txBody>
           <a:bodyPr wrap="square">
             <a:spAutoFit/>
           </a:bodyPr>
-          <a:lstStyle/>
-          <a:p>
-            <a:r>
-              <a:rPr lang="en-US" b="1" dirty="0"/>
-              <a:t>Assignment Question III:</a:t>
-            </a:r>
-            <a:endParaRPr lang="en-US" b="1" dirty="0"/>
-          </a:p>
-          <a:p>
-            <a:endParaRPr lang="en-US" dirty="0"/>
-          </a:p>
-          <a:p>
-            <a:r>
-              <a:rPr lang="en-US" b="1" dirty="0"/>
-              <a:t>GIVEN DATA :</a:t>
-            </a:r>
-            <a:endParaRPr lang="en-US" b="1" dirty="0"/>
-          </a:p>
-          <a:p>
-            <a:endParaRPr lang="en-US" dirty="0"/>
-          </a:p>
-          <a:p>
-            <a:r>
-              <a:rPr lang="en-US" sz="2400" b="0" i="0" dirty="0">
-                <a:solidFill>
-                  <a:srgbClr val="303030"/>
-                </a:solidFill>
-                <a:effectLst/>
-              </a:rPr>
-              <a:t>Calculate the size of memory if its address consists of 22 bits and the memory is 2-byte addressable.</a:t>
-            </a:r>
-            <a:endParaRPr lang="en-US" sz="2400" dirty="0"/>
+          <a:p>
+            <a:pPr>
+              <a:spcAft>
+                <a:spcPct val="60000"/>
+              </a:spcAft>
+            </a:pPr>
+            <a:r>
+              <a:rPr sz="2300" b="1"/>
+              <a:t>Step 1: Calculate the number of pages</a:t>
+            </a:r>
+            <a:endParaRPr sz="2300" b="1"/>
+          </a:p>
+          <a:p>
+            <a:r>
+              <a:rPr sz="1600"/>
+              <a:t>A 32-bit virtual address space can address:</a:t>
+            </a:r>
+            <a:endParaRPr sz="1600"/>
+          </a:p>
+          <a:p>
+            <a:endParaRPr sz="1600"/>
+          </a:p>
+          <a:p>
+            <a:r>
+              <a:rPr lang="en-US" sz="1600"/>
+              <a:t>2</a:t>
+            </a:r>
+            <a:r>
+              <a:rPr sz="1600" baseline="30000"/>
+              <a:t>32</a:t>
+            </a:r>
+            <a:r>
+              <a:rPr sz="1600"/>
+              <a:t> bytes</a:t>
+            </a:r>
+            <a:r>
+              <a:rPr lang="en-US" sz="1600"/>
+              <a:t> </a:t>
+            </a:r>
+            <a:r>
+              <a:rPr sz="1600"/>
+              <a:t>=4GB</a:t>
+            </a:r>
+            <a:endParaRPr sz="1600"/>
+          </a:p>
+          <a:p>
+            <a:endParaRPr sz="1600"/>
+          </a:p>
+          <a:p>
+            <a:r>
+              <a:rPr sz="1600"/>
+              <a:t>Page size:</a:t>
+            </a:r>
+            <a:endParaRPr sz="1600"/>
+          </a:p>
+          <a:p>
+            <a:endParaRPr sz="1600"/>
+          </a:p>
+          <a:p>
+            <a:r>
+              <a:rPr sz="1600"/>
+              <a:t>4KB</a:t>
+            </a:r>
+            <a:r>
+              <a:rPr lang="en-US" sz="1600"/>
+              <a:t> </a:t>
+            </a:r>
+            <a:r>
+              <a:rPr sz="1600"/>
+              <a:t>=2^12</a:t>
+            </a:r>
+            <a:r>
+              <a:rPr lang="en-US" sz="1600"/>
+              <a:t> </a:t>
+            </a:r>
+            <a:r>
+              <a:rPr sz="1600"/>
+              <a:t>bytes</a:t>
+            </a:r>
+            <a:endParaRPr sz="1600"/>
+          </a:p>
+          <a:p>
+            <a:endParaRPr sz="1600"/>
+          </a:p>
+          <a:p>
+            <a:r>
+              <a:rPr sz="1600"/>
+              <a:t>Formula:</a:t>
+            </a:r>
+            <a:endParaRPr sz="1600"/>
+          </a:p>
+          <a:p>
+            <a:endParaRPr sz="1600"/>
+          </a:p>
+          <a:p>
+            <a:r>
+              <a:rPr sz="1600"/>
+              <a:t>Number of pages=Virtual address space</a:t>
+            </a:r>
+            <a:r>
+              <a:rPr lang="en-US" sz="1600"/>
+              <a:t>/</a:t>
+            </a:r>
+            <a:r>
+              <a:rPr sz="1600"/>
+              <a:t>Page size</a:t>
+            </a:r>
+            <a:endParaRPr sz="1600"/>
+          </a:p>
+          <a:p>
+            <a:endParaRPr sz="1600"/>
+          </a:p>
+          <a:p>
+            <a:r>
+              <a:rPr lang="en-US" sz="1600"/>
+              <a:t>2</a:t>
+            </a:r>
+            <a:r>
+              <a:rPr lang="en-US" sz="1600" baseline="30000"/>
+              <a:t>32</a:t>
+            </a:r>
+            <a:r>
+              <a:rPr lang="en-US" sz="1600"/>
+              <a:t>/2</a:t>
+            </a:r>
+            <a:r>
+              <a:rPr lang="en-US" sz="1600" baseline="30000"/>
+              <a:t>12</a:t>
+            </a:r>
+            <a:r>
+              <a:rPr lang="en-US" sz="1600"/>
+              <a:t>=2</a:t>
+            </a:r>
+            <a:r>
+              <a:rPr lang="en-US" sz="1600" baseline="30000"/>
+              <a:t>20</a:t>
+            </a:r>
+            <a:endParaRPr lang="en-US" sz="1600"/>
+          </a:p>
+          <a:p>
+            <a:endParaRPr sz="1600"/>
+          </a:p>
+          <a:p>
+            <a:r>
+              <a:rPr sz="1600"/>
+              <a:t>Therefore,</a:t>
+            </a:r>
+            <a:endParaRPr sz="1600"/>
+          </a:p>
+          <a:p>
+            <a:endParaRPr sz="1600"/>
+          </a:p>
+          <a:p>
+            <a:r>
+              <a:rPr sz="1600"/>
+              <a:t>Number of pages=1,048,576</a:t>
+            </a:r>
+            <a:endParaRPr sz="1600"/>
           </a:p>
         </p:txBody>
       </p:sp>
@@ -11622,6 +11605,886 @@
         </p:nvSpPr>
         <p:spPr>
           <a:xfrm>
+            <a:off x="800100" y="1042988"/>
+            <a:ext cx="9629775" cy="523220"/>
+          </a:xfrm>
+          <a:prstGeom prst="rect">
+            <a:avLst/>
+          </a:prstGeom>
+          <a:noFill/>
+        </p:spPr>
+        <p:txBody>
+          <a:bodyPr wrap="square" rtlCol="0">
+            <a:spAutoFit/>
+          </a:bodyPr>
+          <a:lstStyle/>
+          <a:p>
+            <a:r>
+              <a:rPr lang="en-IN" sz="2800" b="1" dirty="0"/>
+              <a:t>   PAGING EXAMPLE </a:t>
+            </a:r>
+            <a:endParaRPr lang="en-IN" sz="2800" b="1" dirty="0"/>
+          </a:p>
+        </p:txBody>
+      </p:sp>
+      <p:sp>
+        <p:nvSpPr>
+          <p:cNvPr id="7" name="TextBox 6"/>
+          <p:cNvSpPr txBox="1"/>
+          <p:nvPr/>
+        </p:nvSpPr>
+        <p:spPr>
+          <a:xfrm>
+            <a:off x="975455" y="1799272"/>
+            <a:ext cx="10545890" cy="2862322"/>
+          </a:xfrm>
+          <a:prstGeom prst="rect">
+            <a:avLst/>
+          </a:prstGeom>
+          <a:noFill/>
+        </p:spPr>
+        <p:txBody>
+          <a:bodyPr wrap="square">
+            <a:spAutoFit/>
+          </a:bodyPr>
+          <a:lstStyle/>
+          <a:p>
+            <a:r>
+              <a:rPr lang="en-US" b="1" dirty="0"/>
+              <a:t>Assignment Question II:</a:t>
+            </a:r>
+            <a:endParaRPr lang="en-US" b="1" dirty="0"/>
+          </a:p>
+          <a:p>
+            <a:endParaRPr lang="en-US" dirty="0"/>
+          </a:p>
+          <a:p>
+            <a:r>
+              <a:rPr lang="en-US" b="1" dirty="0"/>
+              <a:t>GIVEN DATA :</a:t>
+            </a:r>
+            <a:endParaRPr lang="en-US" b="1" dirty="0"/>
+          </a:p>
+          <a:p>
+            <a:endParaRPr lang="en-US" dirty="0"/>
+          </a:p>
+          <a:p>
+            <a:r>
+              <a:rPr lang="en-US" altLang="en-US" dirty="0"/>
+              <a:t>Calculating internal fragmentation</a:t>
+            </a:r>
+            <a:endParaRPr lang="en-US" altLang="en-US" dirty="0"/>
+          </a:p>
+          <a:p>
+            <a:endParaRPr lang="en-US" altLang="en-US" dirty="0"/>
+          </a:p>
+          <a:p>
+            <a:pPr lvl="1"/>
+            <a:r>
+              <a:rPr lang="en-US" altLang="en-US" dirty="0"/>
+              <a:t>Page size = 2,048 bytes</a:t>
+            </a:r>
+            <a:endParaRPr lang="en-US" altLang="en-US" dirty="0"/>
+          </a:p>
+          <a:p>
+            <a:pPr lvl="1"/>
+            <a:r>
+              <a:rPr lang="en-US" altLang="en-US" dirty="0"/>
+              <a:t>Process size = 72,766 bytes</a:t>
+            </a:r>
+            <a:endParaRPr lang="en-US" altLang="en-US" dirty="0"/>
+          </a:p>
+          <a:p>
+            <a:endParaRPr lang="en-US" dirty="0"/>
+          </a:p>
+          <a:p>
+            <a:r>
+              <a:rPr lang="en-US" dirty="0"/>
+              <a:t>Consider the memory as byte addressable.</a:t>
+            </a:r>
+            <a:endParaRPr lang="en-US" dirty="0"/>
+          </a:p>
+        </p:txBody>
+      </p:sp>
+    </p:spTree>
+  </p:cSld>
+  <p:clrMapOvr>
+    <a:masterClrMapping/>
+  </p:clrMapOvr>
+</p:sld>
+</file>
+
+<file path=ppt/slides/slide32.xml><?xml version="1.0" encoding="utf-8"?>
+<p:sld xmlns:a="http://schemas.openxmlformats.org/drawingml/2006/main" xmlns:r="http://schemas.openxmlformats.org/officeDocument/2006/relationships" xmlns:p="http://schemas.openxmlformats.org/presentationml/2006/main">
+  <p:cSld>
+    <p:spTree>
+      <p:nvGrpSpPr>
+        <p:cNvPr id="1" name=""/>
+        <p:cNvGrpSpPr/>
+        <p:nvPr/>
+      </p:nvGrpSpPr>
+      <p:grpSpPr/>
+      <p:sp>
+        <p:nvSpPr>
+          <p:cNvPr id="4" name="Text Box 3"/>
+          <p:cNvSpPr txBox="1"/>
+          <p:nvPr/>
+        </p:nvSpPr>
+        <p:spPr>
+          <a:xfrm>
+            <a:off x="1023620" y="360045"/>
+            <a:ext cx="9482455" cy="3187065"/>
+          </a:xfrm>
+          <a:prstGeom prst="rect">
+            <a:avLst/>
+          </a:prstGeom>
+        </p:spPr>
+        <p:txBody>
+          <a:bodyPr wrap="square">
+            <a:spAutoFit/>
+          </a:bodyPr>
+          <a:p>
+            <a:pPr>
+              <a:spcAft>
+                <a:spcPct val="60000"/>
+              </a:spcAft>
+            </a:pPr>
+            <a:r>
+              <a:rPr sz="2300" b="1"/>
+              <a:t>Step 1: Calculate the number of pages required</a:t>
+            </a:r>
+            <a:endParaRPr sz="2300" b="1"/>
+          </a:p>
+          <a:p>
+            <a:r>
+              <a:rPr sz="1600"/>
+              <a:t>Formula:</a:t>
+            </a:r>
+            <a:endParaRPr sz="1600"/>
+          </a:p>
+          <a:p>
+            <a:r>
+              <a:rPr sz="1600"/>
+              <a:t>Number of pages= Process size</a:t>
+            </a:r>
+            <a:r>
+              <a:rPr lang="en-US" sz="1600"/>
+              <a:t>/</a:t>
+            </a:r>
+            <a:r>
+              <a:rPr sz="1600"/>
+              <a:t>Page size</a:t>
+            </a:r>
+            <a:endParaRPr sz="1600"/>
+          </a:p>
+          <a:p>
+            <a:endParaRPr sz="1600"/>
+          </a:p>
+          <a:p>
+            <a:r>
+              <a:rPr sz="1600"/>
+              <a:t>Substitute the values:</a:t>
+            </a:r>
+            <a:endParaRPr sz="1600"/>
+          </a:p>
+          <a:p>
+            <a:endParaRPr sz="1600"/>
+          </a:p>
+          <a:p>
+            <a:r>
+              <a:rPr lang="en-US" sz="1600"/>
+              <a:t>Pages=72766/2048</a:t>
+            </a:r>
+            <a:endParaRPr lang="en-US" sz="1600"/>
+          </a:p>
+          <a:p>
+            <a:r>
+              <a:rPr lang="en-US" sz="1600"/>
+              <a:t>=35.53</a:t>
+            </a:r>
+            <a:endParaRPr lang="en-US" sz="1600"/>
+          </a:p>
+          <a:p>
+            <a:endParaRPr sz="1600"/>
+          </a:p>
+          <a:p>
+            <a:r>
+              <a:rPr sz="1600"/>
+              <a:t>Since we cannot allocate a fraction of a page:</a:t>
+            </a:r>
+            <a:endParaRPr sz="1600"/>
+          </a:p>
+          <a:p>
+            <a:r>
+              <a:rPr sz="1600"/>
+              <a:t>Number of pages=36</a:t>
+            </a:r>
+            <a:endParaRPr sz="1600"/>
+          </a:p>
+        </p:txBody>
+      </p:sp>
+      <p:sp>
+        <p:nvSpPr>
+          <p:cNvPr id="5" name="Text Box 4"/>
+          <p:cNvSpPr txBox="1"/>
+          <p:nvPr/>
+        </p:nvSpPr>
+        <p:spPr>
+          <a:xfrm>
+            <a:off x="1101090" y="3547110"/>
+            <a:ext cx="9093835" cy="1463040"/>
+          </a:xfrm>
+          <a:prstGeom prst="rect">
+            <a:avLst/>
+          </a:prstGeom>
+        </p:spPr>
+        <p:txBody>
+          <a:bodyPr wrap="square">
+            <a:spAutoFit/>
+          </a:bodyPr>
+          <a:p>
+            <a:pPr>
+              <a:spcAft>
+                <a:spcPct val="60000"/>
+              </a:spcAft>
+            </a:pPr>
+            <a:r>
+              <a:rPr sz="2300" b="1"/>
+              <a:t>Step 2: Calculate total allocated memory</a:t>
+            </a:r>
+            <a:endParaRPr sz="2300" b="1"/>
+          </a:p>
+          <a:p>
+            <a:r>
+              <a:rPr sz="1600"/>
+              <a:t>Each page contains 2,048 bytes.</a:t>
+            </a:r>
+            <a:endParaRPr sz="1600"/>
+          </a:p>
+          <a:p>
+            <a:r>
+              <a:rPr sz="1600"/>
+              <a:t>Allocated memory=36</a:t>
+            </a:r>
+            <a:r>
+              <a:rPr lang="en-US" sz="1600"/>
+              <a:t> x </a:t>
+            </a:r>
+            <a:r>
+              <a:rPr sz="1600"/>
+              <a:t>2048 </a:t>
+            </a:r>
+            <a:endParaRPr sz="1600"/>
+          </a:p>
+          <a:p>
+            <a:r>
+              <a:rPr sz="1600"/>
+              <a:t>73728</a:t>
+            </a:r>
+            <a:r>
+              <a:rPr lang="en-US" sz="1600"/>
+              <a:t> bytes</a:t>
+            </a:r>
+            <a:endParaRPr lang="en-US" sz="1600"/>
+          </a:p>
+        </p:txBody>
+      </p:sp>
+      <p:sp>
+        <p:nvSpPr>
+          <p:cNvPr id="6" name="Text Box 5"/>
+          <p:cNvSpPr txBox="1"/>
+          <p:nvPr/>
+        </p:nvSpPr>
+        <p:spPr>
+          <a:xfrm>
+            <a:off x="1101090" y="5034915"/>
+            <a:ext cx="8703310" cy="1709420"/>
+          </a:xfrm>
+          <a:prstGeom prst="rect">
+            <a:avLst/>
+          </a:prstGeom>
+        </p:spPr>
+        <p:txBody>
+          <a:bodyPr wrap="square">
+            <a:spAutoFit/>
+          </a:bodyPr>
+          <a:p>
+            <a:pPr>
+              <a:spcAft>
+                <a:spcPct val="60000"/>
+              </a:spcAft>
+            </a:pPr>
+            <a:r>
+              <a:rPr sz="2300" b="1"/>
+              <a:t>Step 3: Calculate internal fragmentation</a:t>
+            </a:r>
+            <a:endParaRPr sz="2300" b="1"/>
+          </a:p>
+          <a:p>
+            <a:r>
+              <a:rPr sz="1600"/>
+              <a:t>Formula:</a:t>
+            </a:r>
+            <a:endParaRPr sz="1600"/>
+          </a:p>
+          <a:p>
+            <a:r>
+              <a:rPr sz="1600"/>
+              <a:t>Internal Fragmentation=Allocated memory-Process size</a:t>
+            </a:r>
+            <a:endParaRPr sz="1600"/>
+          </a:p>
+          <a:p>
+            <a:r>
+              <a:rPr sz="1600"/>
+              <a:t>Substitute the values:</a:t>
+            </a:r>
+            <a:endParaRPr sz="1600"/>
+          </a:p>
+          <a:p>
+            <a:r>
+              <a:rPr sz="1600"/>
+              <a:t>=73728-72766</a:t>
+            </a:r>
+            <a:r>
+              <a:rPr lang="en-US" sz="1600"/>
+              <a:t>=</a:t>
+            </a:r>
+            <a:r>
+              <a:rPr sz="1600"/>
+              <a:t>962</a:t>
+            </a:r>
+            <a:r>
+              <a:rPr lang="en-US" sz="1600"/>
+              <a:t> </a:t>
+            </a:r>
+            <a:r>
+              <a:rPr sz="1600"/>
+              <a:t>bytes</a:t>
+            </a:r>
+            <a:endParaRPr sz="1600"/>
+          </a:p>
+        </p:txBody>
+      </p:sp>
+    </p:spTree>
+  </p:cSld>
+  <p:clrMapOvr>
+    <a:masterClrMapping/>
+  </p:clrMapOvr>
+</p:sld>
+</file>
+
+<file path=ppt/slides/slide33.xml><?xml version="1.0" encoding="utf-8"?>
+<p:sld xmlns:a="http://schemas.openxmlformats.org/drawingml/2006/main" xmlns:r="http://schemas.openxmlformats.org/officeDocument/2006/relationships" xmlns:p="http://schemas.openxmlformats.org/presentationml/2006/main">
+  <p:cSld>
+    <p:spTree>
+      <p:nvGrpSpPr>
+        <p:cNvPr id="1" name=""/>
+        <p:cNvGrpSpPr/>
+        <p:nvPr/>
+      </p:nvGrpSpPr>
+      <p:grpSpPr>
+        <a:xfrm>
+          <a:off x="0" y="0"/>
+          <a:ext cx="0" cy="0"/>
+          <a:chOff x="0" y="0"/>
+          <a:chExt cx="0" cy="0"/>
+        </a:xfrm>
+      </p:grpSpPr>
+      <p:sp>
+        <p:nvSpPr>
+          <p:cNvPr id="2" name="Title 1"/>
+          <p:cNvSpPr>
+            <a:spLocks noGrp="1"/>
+          </p:cNvSpPr>
+          <p:nvPr>
+            <p:ph type="title"/>
+          </p:nvPr>
+        </p:nvSpPr>
+        <p:spPr>
+          <a:xfrm>
+            <a:off x="1069848" y="484632"/>
+            <a:ext cx="10058400" cy="558356"/>
+          </a:xfrm>
+        </p:spPr>
+        <p:txBody>
+          <a:bodyPr>
+            <a:normAutofit fontScale="90000"/>
+          </a:bodyPr>
+          <a:lstStyle/>
+          <a:p>
+            <a:r>
+              <a:rPr lang="en-IN" dirty="0"/>
+              <a:t>MemORY MANAGEMENT</a:t>
+            </a:r>
+            <a:endParaRPr lang="en-IN" dirty="0"/>
+          </a:p>
+        </p:txBody>
+      </p:sp>
+      <p:sp>
+        <p:nvSpPr>
+          <p:cNvPr id="4" name="AutoShape 2" descr="PAGING&#10;MEMORY MANAGEMENT                                       New Concept!!&#10;&#10;&#10;•   Logical address space of a process can be noncontiguous; process is&#10;    allocated physical memory whenever that memory is available and the&#10;    program needs it.&#10;•   Divide physical memory into fixed-sized blocks called frames (size is&#10;    power of 2, between 512 bytes and 8192 bytes).&#10;•   Divide logical memory into blocks of same size called pages.&#10;•   Keep track of all free frames.&#10;•   To run a program of size n pages, need to find n free frames and load&#10;    program.&#10;•   Set up a page table to translate logical to physical addresses.&#10;•   Internal fragmentation.&#10;&#10;&#10;&#10;                            8: Memory Management                     20&#10; "/>
+          <p:cNvSpPr>
+            <a:spLocks noChangeAspect="1" noChangeArrowheads="1"/>
+          </p:cNvSpPr>
+          <p:nvPr/>
+        </p:nvSpPr>
+        <p:spPr bwMode="auto">
+          <a:xfrm>
+            <a:off x="5943600" y="3276600"/>
+            <a:ext cx="304800" cy="304800"/>
+          </a:xfrm>
+          <a:prstGeom prst="rect">
+            <a:avLst/>
+          </a:prstGeom>
+          <a:noFill/>
+          <a:extLst>
+            <a:ext uri="{909E8E84-426E-40DD-AFC4-6F175D3DCCD1}">
+              <a14:hiddenFill xmlns:a14="http://schemas.microsoft.com/office/drawing/2010/main">
+                <a:solidFill>
+                  <a:srgbClr val="FFFFFF"/>
+                </a:solidFill>
+              </a14:hiddenFill>
+            </a:ext>
+          </a:extLst>
+        </p:spPr>
+        <p:txBody>
+          <a:bodyPr vert="horz" wrap="square" lIns="91440" tIns="45720" rIns="91440" bIns="45720" numCol="1" anchor="t" anchorCtr="0" compatLnSpc="1"/>
+          <a:lstStyle/>
+          <a:p>
+            <a:endParaRPr lang="en-IN"/>
+          </a:p>
+        </p:txBody>
+      </p:sp>
+      <p:sp>
+        <p:nvSpPr>
+          <p:cNvPr id="6" name="TextBox 5"/>
+          <p:cNvSpPr txBox="1"/>
+          <p:nvPr/>
+        </p:nvSpPr>
+        <p:spPr>
+          <a:xfrm>
+            <a:off x="800100" y="1042988"/>
+            <a:ext cx="9629775" cy="523220"/>
+          </a:xfrm>
+          <a:prstGeom prst="rect">
+            <a:avLst/>
+          </a:prstGeom>
+          <a:noFill/>
+        </p:spPr>
+        <p:txBody>
+          <a:bodyPr wrap="square" rtlCol="0">
+            <a:spAutoFit/>
+          </a:bodyPr>
+          <a:lstStyle/>
+          <a:p>
+            <a:r>
+              <a:rPr lang="en-IN" sz="2800" b="1" dirty="0"/>
+              <a:t>   PAGING EXAMPLE </a:t>
+            </a:r>
+            <a:endParaRPr lang="en-IN" sz="2800" b="1" dirty="0"/>
+          </a:p>
+        </p:txBody>
+      </p:sp>
+      <p:sp>
+        <p:nvSpPr>
+          <p:cNvPr id="7" name="TextBox 6"/>
+          <p:cNvSpPr txBox="1"/>
+          <p:nvPr/>
+        </p:nvSpPr>
+        <p:spPr>
+          <a:xfrm>
+            <a:off x="975455" y="1799272"/>
+            <a:ext cx="10545890" cy="1938992"/>
+          </a:xfrm>
+          <a:prstGeom prst="rect">
+            <a:avLst/>
+          </a:prstGeom>
+          <a:noFill/>
+        </p:spPr>
+        <p:txBody>
+          <a:bodyPr wrap="square">
+            <a:spAutoFit/>
+          </a:bodyPr>
+          <a:lstStyle/>
+          <a:p>
+            <a:r>
+              <a:rPr lang="en-US" b="1" dirty="0"/>
+              <a:t>Assignment Question III:</a:t>
+            </a:r>
+            <a:endParaRPr lang="en-US" b="1" dirty="0"/>
+          </a:p>
+          <a:p>
+            <a:endParaRPr lang="en-US" dirty="0"/>
+          </a:p>
+          <a:p>
+            <a:r>
+              <a:rPr lang="en-US" b="1" dirty="0"/>
+              <a:t>GIVEN DATA :</a:t>
+            </a:r>
+            <a:endParaRPr lang="en-US" b="1" dirty="0"/>
+          </a:p>
+          <a:p>
+            <a:endParaRPr lang="en-US" dirty="0"/>
+          </a:p>
+          <a:p>
+            <a:r>
+              <a:rPr lang="en-US" sz="2400" b="0" i="0" dirty="0">
+                <a:solidFill>
+                  <a:srgbClr val="303030"/>
+                </a:solidFill>
+                <a:effectLst/>
+              </a:rPr>
+              <a:t>Calculate the size of memory if its address consists of 22 bits and the memory is 2-byte addressable.</a:t>
+            </a:r>
+            <a:endParaRPr lang="en-US" sz="2400" dirty="0"/>
+          </a:p>
+        </p:txBody>
+      </p:sp>
+    </p:spTree>
+  </p:cSld>
+  <p:clrMapOvr>
+    <a:masterClrMapping/>
+  </p:clrMapOvr>
+</p:sld>
+</file>
+
+<file path=ppt/slides/slide34.xml><?xml version="1.0" encoding="utf-8"?>
+<p:sld xmlns:a="http://schemas.openxmlformats.org/drawingml/2006/main" xmlns:r="http://schemas.openxmlformats.org/officeDocument/2006/relationships" xmlns:p="http://schemas.openxmlformats.org/presentationml/2006/main">
+  <p:cSld>
+    <p:spTree>
+      <p:nvGrpSpPr>
+        <p:cNvPr id="1" name=""/>
+        <p:cNvGrpSpPr/>
+        <p:nvPr/>
+      </p:nvGrpSpPr>
+      <p:grpSpPr/>
+      <p:sp>
+        <p:nvSpPr>
+          <p:cNvPr id="4" name="Text Box 3"/>
+          <p:cNvSpPr txBox="1"/>
+          <p:nvPr/>
+        </p:nvSpPr>
+        <p:spPr>
+          <a:xfrm>
+            <a:off x="509905" y="1028065"/>
+            <a:ext cx="10379710" cy="4124960"/>
+          </a:xfrm>
+          <a:prstGeom prst="rect">
+            <a:avLst/>
+          </a:prstGeom>
+        </p:spPr>
+        <p:txBody>
+          <a:bodyPr wrap="square">
+            <a:spAutoFit/>
+          </a:bodyPr>
+          <a:p>
+            <a:pPr>
+              <a:spcAft>
+                <a:spcPct val="60000"/>
+              </a:spcAft>
+            </a:pPr>
+            <a:r>
+              <a:rPr sz="2200" b="1"/>
+              <a:t>Step 1: Understand 22-bit addressing</a:t>
+            </a:r>
+            <a:endParaRPr sz="2200" b="1"/>
+          </a:p>
+          <a:p>
+            <a:r>
+              <a:rPr sz="1600"/>
+              <a:t>An address consisting of 22 bits can represent:</a:t>
+            </a:r>
+            <a:endParaRPr sz="1600"/>
+          </a:p>
+          <a:p>
+            <a:r>
+              <a:rPr sz="1600"/>
+              <a:t>2</a:t>
+            </a:r>
+            <a:r>
+              <a:rPr sz="1600" baseline="30000"/>
+              <a:t>22</a:t>
+            </a:r>
+            <a:r>
+              <a:rPr sz="1600"/>
+              <a:t>=4,194,304</a:t>
+            </a:r>
+            <a:r>
+              <a:rPr lang="en-US" sz="1600"/>
+              <a:t> </a:t>
+            </a:r>
+            <a:r>
+              <a:rPr sz="1600"/>
+              <a:t>addresses</a:t>
+            </a:r>
+            <a:endParaRPr sz="1600"/>
+          </a:p>
+          <a:p>
+            <a:pPr>
+              <a:spcAft>
+                <a:spcPct val="60000"/>
+              </a:spcAft>
+            </a:pPr>
+            <a:r>
+              <a:rPr sz="2200" b="1"/>
+              <a:t>Step 2: Understand 2-byte addressability</a:t>
+            </a:r>
+            <a:endParaRPr sz="2200" b="1"/>
+          </a:p>
+          <a:p>
+            <a:r>
+              <a:rPr sz="1600"/>
+              <a:t>Each address refers to 2 bytes</a:t>
+            </a:r>
+            <a:r>
+              <a:rPr lang="en-US" sz="1600"/>
+              <a:t> </a:t>
+            </a:r>
+            <a:r>
+              <a:rPr sz="1600"/>
+              <a:t>of memory.</a:t>
+            </a:r>
+            <a:endParaRPr sz="1600"/>
+          </a:p>
+          <a:p>
+            <a:r>
+              <a:rPr sz="1600"/>
+              <a:t>Therefor:</a:t>
+            </a:r>
+            <a:endParaRPr sz="1600"/>
+          </a:p>
+          <a:p>
+            <a:r>
+              <a:rPr sz="1600"/>
+              <a:t>Memory size=2</a:t>
+            </a:r>
+            <a:r>
+              <a:rPr sz="1600" baseline="30000"/>
+              <a:t>22</a:t>
+            </a:r>
+            <a:r>
+              <a:rPr lang="en-US" sz="1600"/>
+              <a:t> x </a:t>
+            </a:r>
+            <a:r>
+              <a:rPr sz="1600"/>
+              <a:t>2</a:t>
+            </a:r>
+            <a:endParaRPr sz="1600"/>
+          </a:p>
+          <a:p>
+            <a:r>
+              <a:rPr sz="1600"/>
+              <a:t>=2</a:t>
+            </a:r>
+            <a:r>
+              <a:rPr sz="1600" baseline="30000"/>
+              <a:t>22</a:t>
+            </a:r>
+            <a:r>
+              <a:rPr lang="en-US" sz="1600" baseline="30000"/>
+              <a:t> x </a:t>
+            </a:r>
+            <a:r>
+              <a:rPr sz="1600"/>
+              <a:t>2</a:t>
+            </a:r>
+            <a:r>
+              <a:rPr sz="1600" baseline="30000"/>
+              <a:t>1</a:t>
+            </a:r>
+            <a:r>
+              <a:rPr sz="1600"/>
+              <a:t>=2</a:t>
+            </a:r>
+            <a:r>
+              <a:rPr sz="1600" baseline="30000"/>
+              <a:t>23</a:t>
+            </a:r>
+            <a:r>
+              <a:rPr sz="1600"/>
+              <a:t> bytes</a:t>
+            </a:r>
+            <a:endParaRPr sz="1600"/>
+          </a:p>
+          <a:p>
+            <a:pPr>
+              <a:spcAft>
+                <a:spcPct val="60000"/>
+              </a:spcAft>
+            </a:pPr>
+            <a:r>
+              <a:rPr sz="2200" b="1"/>
+              <a:t>Step 3: Convert bytes to MB</a:t>
+            </a:r>
+            <a:endParaRPr sz="2200" b="1"/>
+          </a:p>
+          <a:p>
+            <a:r>
+              <a:rPr sz="1600"/>
+              <a:t>2</a:t>
+            </a:r>
+            <a:r>
+              <a:rPr sz="1600" baseline="30000"/>
+              <a:t>23</a:t>
+            </a:r>
+            <a:r>
+              <a:rPr sz="1600"/>
+              <a:t>=8,388,608 bytes</a:t>
+            </a:r>
+            <a:endParaRPr sz="1600"/>
+          </a:p>
+          <a:p>
+            <a:r>
+              <a:rPr sz="1600"/>
+              <a:t>Since 1 MB=2</a:t>
+            </a:r>
+            <a:r>
+              <a:rPr sz="1600" baseline="30000"/>
+              <a:t>20</a:t>
+            </a:r>
+            <a:r>
+              <a:rPr sz="1600"/>
+              <a:t> bytes</a:t>
+            </a:r>
+            <a:endParaRPr sz="1600"/>
+          </a:p>
+          <a:p>
+            <a:r>
+              <a:rPr sz="1600"/>
+              <a:t>2</a:t>
+            </a:r>
+            <a:r>
+              <a:rPr sz="1600" baseline="30000"/>
+              <a:t>23</a:t>
+            </a:r>
+            <a:r>
+              <a:rPr lang="en-US" sz="1600" baseline="30000"/>
+              <a:t>/</a:t>
+            </a:r>
+            <a:r>
+              <a:rPr sz="1600"/>
+              <a:t>2</a:t>
+            </a:r>
+            <a:r>
+              <a:rPr sz="1600" baseline="30000"/>
+              <a:t>20</a:t>
+            </a:r>
+            <a:r>
+              <a:rPr sz="1600"/>
+              <a:t>=2</a:t>
+            </a:r>
+            <a:r>
+              <a:rPr sz="1600" baseline="30000"/>
+              <a:t>3</a:t>
+            </a:r>
+            <a:r>
+              <a:rPr sz="1600"/>
+              <a:t>=8 MB</a:t>
+            </a:r>
+            <a:endParaRPr sz="1600"/>
+          </a:p>
+        </p:txBody>
+      </p:sp>
+    </p:spTree>
+  </p:cSld>
+  <p:clrMapOvr>
+    <a:masterClrMapping/>
+  </p:clrMapOvr>
+</p:sld>
+</file>
+
+<file path=ppt/slides/slide35.xml><?xml version="1.0" encoding="utf-8"?>
+<p:sld xmlns:a="http://schemas.openxmlformats.org/drawingml/2006/main" xmlns:r="http://schemas.openxmlformats.org/officeDocument/2006/relationships" xmlns:p="http://schemas.openxmlformats.org/presentationml/2006/main">
+  <p:cSld>
+    <p:spTree>
+      <p:nvGrpSpPr>
+        <p:cNvPr id="1" name=""/>
+        <p:cNvGrpSpPr/>
+        <p:nvPr/>
+      </p:nvGrpSpPr>
+      <p:grpSpPr>
+        <a:xfrm>
+          <a:off x="0" y="0"/>
+          <a:ext cx="0" cy="0"/>
+          <a:chOff x="0" y="0"/>
+          <a:chExt cx="0" cy="0"/>
+        </a:xfrm>
+      </p:grpSpPr>
+      <p:sp>
+        <p:nvSpPr>
+          <p:cNvPr id="2" name="Title 1"/>
+          <p:cNvSpPr>
+            <a:spLocks noGrp="1"/>
+          </p:cNvSpPr>
+          <p:nvPr>
+            <p:ph type="title"/>
+          </p:nvPr>
+        </p:nvSpPr>
+        <p:spPr>
+          <a:xfrm>
+            <a:off x="1069848" y="484632"/>
+            <a:ext cx="10058400" cy="558356"/>
+          </a:xfrm>
+        </p:spPr>
+        <p:txBody>
+          <a:bodyPr>
+            <a:normAutofit fontScale="90000"/>
+          </a:bodyPr>
+          <a:lstStyle/>
+          <a:p>
+            <a:r>
+              <a:rPr lang="en-IN" dirty="0"/>
+              <a:t>MemORY MANAGEMENT</a:t>
+            </a:r>
+            <a:endParaRPr lang="en-IN" dirty="0"/>
+          </a:p>
+        </p:txBody>
+      </p:sp>
+      <p:sp>
+        <p:nvSpPr>
+          <p:cNvPr id="4" name="AutoShape 2" descr="PAGING&#10;MEMORY MANAGEMENT                                       New Concept!!&#10;&#10;&#10;•   Logical address space of a process can be noncontiguous; process is&#10;    allocated physical memory whenever that memory is available and the&#10;    program needs it.&#10;•   Divide physical memory into fixed-sized blocks called frames (size is&#10;    power of 2, between 512 bytes and 8192 bytes).&#10;•   Divide logical memory into blocks of same size called pages.&#10;•   Keep track of all free frames.&#10;•   To run a program of size n pages, need to find n free frames and load&#10;    program.&#10;•   Set up a page table to translate logical to physical addresses.&#10;•   Internal fragmentation.&#10;&#10;&#10;&#10;                            8: Memory Management                     20&#10; "/>
+          <p:cNvSpPr>
+            <a:spLocks noChangeAspect="1" noChangeArrowheads="1"/>
+          </p:cNvSpPr>
+          <p:nvPr/>
+        </p:nvSpPr>
+        <p:spPr bwMode="auto">
+          <a:xfrm>
+            <a:off x="5943600" y="3276600"/>
+            <a:ext cx="304800" cy="304800"/>
+          </a:xfrm>
+          <a:prstGeom prst="rect">
+            <a:avLst/>
+          </a:prstGeom>
+          <a:noFill/>
+          <a:extLst>
+            <a:ext uri="{909E8E84-426E-40DD-AFC4-6F175D3DCCD1}">
+              <a14:hiddenFill xmlns:a14="http://schemas.microsoft.com/office/drawing/2010/main">
+                <a:solidFill>
+                  <a:srgbClr val="FFFFFF"/>
+                </a:solidFill>
+              </a14:hiddenFill>
+            </a:ext>
+          </a:extLst>
+        </p:spPr>
+        <p:txBody>
+          <a:bodyPr vert="horz" wrap="square" lIns="91440" tIns="45720" rIns="91440" bIns="45720" numCol="1" anchor="t" anchorCtr="0" compatLnSpc="1"/>
+          <a:lstStyle/>
+          <a:p>
+            <a:endParaRPr lang="en-IN"/>
+          </a:p>
+        </p:txBody>
+      </p:sp>
+      <p:sp>
+        <p:nvSpPr>
+          <p:cNvPr id="6" name="TextBox 5"/>
+          <p:cNvSpPr txBox="1"/>
+          <p:nvPr/>
+        </p:nvSpPr>
+        <p:spPr>
+          <a:xfrm>
             <a:off x="1069848" y="1214438"/>
             <a:ext cx="9244012" cy="523220"/>
           </a:xfrm>
@@ -11668,6 +12531,34 @@
           </a:prstGeom>
         </p:spPr>
       </p:pic>
+      <p:pic>
+        <p:nvPicPr>
+          <p:cNvPr id="7" name="Picture 6"/>
+          <p:cNvPicPr/>
+          <p:nvPr/>
+        </p:nvPicPr>
+        <p:blipFill>
+          <a:blip r:embed="rId2">
+            <a:extLst>
+              <a:ext uri="{96DAC541-7B7A-43D3-8B79-37D633B846F1}">
+                <asvg:svgBlip xmlns:asvg="http://schemas.microsoft.com/office/drawing/2016/SVG/main" r:embed="rId3"/>
+              </a:ext>
+            </a:extLst>
+          </a:blip>
+          <a:stretch>
+            <a:fillRect/>
+          </a:stretch>
+        </p:blipFill>
+        <p:spPr>
+          <a:xfrm>
+            <a:off x="7783830" y="2427605"/>
+            <a:ext cx="4025265" cy="2981960"/>
+          </a:xfrm>
+          <a:prstGeom prst="rect">
+            <a:avLst/>
+          </a:prstGeom>
+        </p:spPr>
+      </p:pic>
     </p:spTree>
   </p:cSld>
   <p:clrMapOvr>
@@ -11676,7 +12567,7 @@
 </p:sld>
 </file>
 
-<file path=ppt/slides/slide32.xml><?xml version="1.0" encoding="utf-8"?>
+<file path=ppt/slides/slide36.xml><?xml version="1.0" encoding="utf-8"?>
 <p:sld xmlns:a="http://schemas.openxmlformats.org/drawingml/2006/main" xmlns:r="http://schemas.openxmlformats.org/officeDocument/2006/relationships" xmlns:p="http://schemas.openxmlformats.org/presentationml/2006/main">
   <p:cSld>
     <p:spTree>
@@ -11766,7 +12657,7 @@
         </p:nvSpPr>
         <p:spPr>
           <a:xfrm>
-            <a:off x="1069848" y="1214438"/>
+            <a:off x="1069848" y="1042988"/>
             <a:ext cx="9244012" cy="523220"/>
           </a:xfrm>
           <a:prstGeom prst="rect">
@@ -11804,7 +12695,7 @@
         </p:blipFill>
         <p:spPr>
           <a:xfrm>
-            <a:off x="4248752" y="1909108"/>
+            <a:off x="7943182" y="1614468"/>
             <a:ext cx="3694496" cy="4840644"/>
           </a:xfrm>
           <a:prstGeom prst="rect">
@@ -11812,6 +12703,122 @@
           </a:prstGeom>
         </p:spPr>
       </p:pic>
+      <p:sp>
+        <p:nvSpPr>
+          <p:cNvPr id="3" name="Text Box 2"/>
+          <p:cNvSpPr txBox="1"/>
+          <p:nvPr/>
+        </p:nvSpPr>
+        <p:spPr>
+          <a:xfrm>
+            <a:off x="661670" y="1614170"/>
+            <a:ext cx="7281545" cy="5015865"/>
+          </a:xfrm>
+          <a:prstGeom prst="rect">
+            <a:avLst/>
+          </a:prstGeom>
+        </p:spPr>
+        <p:txBody>
+          <a:bodyPr wrap="square">
+            <a:spAutoFit/>
+          </a:bodyPr>
+          <a:p>
+            <a:r>
+              <a:rPr sz="1600"/>
+              <a:t>This slide illustrates how a programmer views a program as separate logical units rather than one continuous block.</a:t>
+            </a:r>
+            <a:endParaRPr sz="1600"/>
+          </a:p>
+          <a:p>
+            <a:endParaRPr sz="1600"/>
+          </a:p>
+          <a:p>
+            <a:r>
+              <a:rPr sz="1600"/>
+              <a:t>Imagine a program containing:</a:t>
+            </a:r>
+            <a:endParaRPr sz="1600"/>
+          </a:p>
+          <a:p>
+            <a:endParaRPr sz="1600"/>
+          </a:p>
+          <a:p>
+            <a:r>
+              <a:rPr sz="1600"/>
+              <a:t>Segment 0: Code</a:t>
+            </a:r>
+            <a:endParaRPr sz="1600"/>
+          </a:p>
+          <a:p>
+            <a:r>
+              <a:rPr sz="1600"/>
+              <a:t>Instructions to execute</a:t>
+            </a:r>
+            <a:endParaRPr sz="1600"/>
+          </a:p>
+          <a:p>
+            <a:endParaRPr sz="1600"/>
+          </a:p>
+          <a:p>
+            <a:r>
+              <a:rPr sz="1600"/>
+              <a:t>Segment 1: Data</a:t>
+            </a:r>
+            <a:endParaRPr sz="1600"/>
+          </a:p>
+          <a:p>
+            <a:r>
+              <a:rPr sz="1600"/>
+              <a:t>Variables and stored values</a:t>
+            </a:r>
+            <a:endParaRPr sz="1600"/>
+          </a:p>
+          <a:p>
+            <a:endParaRPr sz="1600"/>
+          </a:p>
+          <a:p>
+            <a:r>
+              <a:rPr sz="1600"/>
+              <a:t>Segment 2: Stack</a:t>
+            </a:r>
+            <a:endParaRPr sz="1600"/>
+          </a:p>
+          <a:p>
+            <a:r>
+              <a:rPr sz="1600"/>
+              <a:t>Function calls and local variables</a:t>
+            </a:r>
+            <a:endParaRPr sz="1600"/>
+          </a:p>
+          <a:p>
+            <a:endParaRPr sz="1600"/>
+          </a:p>
+          <a:p>
+            <a:r>
+              <a:rPr sz="1600"/>
+              <a:t>Segment 3: Heap</a:t>
+            </a:r>
+            <a:endParaRPr sz="1600"/>
+          </a:p>
+          <a:p>
+            <a:r>
+              <a:rPr sz="1600"/>
+              <a:t>Dynamically allocated memory</a:t>
+            </a:r>
+            <a:endParaRPr sz="1600"/>
+          </a:p>
+          <a:p>
+            <a:endParaRPr sz="1600"/>
+          </a:p>
+          <a:p>
+            <a:r>
+              <a:rPr sz="1600"/>
+              <a:t>Each segment represents a meaningful part of the program. The operating system can map these segments to different locations in physical memory.</a:t>
+            </a:r>
+            <a:endParaRPr sz="1600"/>
+          </a:p>
+        </p:txBody>
+      </p:sp>
     </p:spTree>
   </p:cSld>
   <p:clrMapOvr>
@@ -11820,7 +12827,7 @@
 </p:sld>
 </file>
 
-<file path=ppt/slides/slide33.xml><?xml version="1.0" encoding="utf-8"?>
+<file path=ppt/slides/slide37.xml><?xml version="1.0" encoding="utf-8"?>
 <p:sld xmlns:a="http://schemas.openxmlformats.org/drawingml/2006/main" xmlns:r="http://schemas.openxmlformats.org/officeDocument/2006/relationships" xmlns:p="http://schemas.openxmlformats.org/presentationml/2006/main">
   <p:cSld>
     <p:spTree>
@@ -14412,7 +15419,7 @@
 </p:sld>
 </file>
 
-<file path=ppt/slides/slide34.xml><?xml version="1.0" encoding="utf-8"?>
+<file path=ppt/slides/slide38.xml><?xml version="1.0" encoding="utf-8"?>
 <p:sld xmlns:a="http://schemas.openxmlformats.org/drawingml/2006/main" xmlns:r="http://schemas.openxmlformats.org/officeDocument/2006/relationships" xmlns:p="http://schemas.openxmlformats.org/presentationml/2006/main">
   <p:cSld>
     <p:spTree>
@@ -15058,7 +16065,7 @@
 </p:sld>
 </file>
 
-<file path=ppt/slides/slide35.xml><?xml version="1.0" encoding="utf-8"?>
+<file path=ppt/slides/slide39.xml><?xml version="1.0" encoding="utf-8"?>
 <p:sld xmlns:a="http://schemas.openxmlformats.org/drawingml/2006/main" xmlns:r="http://schemas.openxmlformats.org/officeDocument/2006/relationships" xmlns:p="http://schemas.openxmlformats.org/presentationml/2006/main">
   <p:cSld>
     <p:spTree>
@@ -15193,8 +16200,8 @@
         </p:blipFill>
         <p:spPr bwMode="auto">
           <a:xfrm>
-            <a:off x="1171575" y="1909108"/>
-            <a:ext cx="9429750" cy="4089400"/>
+            <a:off x="1171575" y="1908810"/>
+            <a:ext cx="8134985" cy="3528060"/>
           </a:xfrm>
           <a:prstGeom prst="rect">
             <a:avLst/>
@@ -15232,7 +16239,7 @@
 </p:sld>
 </file>
 
-<file path=ppt/slides/slide36.xml><?xml version="1.0" encoding="utf-8"?>
+<file path=ppt/slides/slide4.xml><?xml version="1.0" encoding="utf-8"?>
 <p:sld xmlns:a="http://schemas.openxmlformats.org/drawingml/2006/main" xmlns:r="http://schemas.openxmlformats.org/officeDocument/2006/relationships" xmlns:p="http://schemas.openxmlformats.org/presentationml/2006/main">
   <p:cSld>
     <p:spTree>
@@ -15281,6 +16288,361 @@
       </p:sp>
       <p:sp>
         <p:nvSpPr>
+          <p:cNvPr id="3" name="Content Placeholder 2"/>
+          <p:cNvSpPr>
+            <a:spLocks noGrp="1"/>
+          </p:cNvSpPr>
+          <p:nvPr>
+            <p:ph idx="1"/>
+          </p:nvPr>
+        </p:nvSpPr>
+        <p:spPr>
+          <a:xfrm>
+            <a:off x="1069848" y="1214438"/>
+            <a:ext cx="10058400" cy="4957762"/>
+          </a:xfrm>
+        </p:spPr>
+        <p:txBody>
+          <a:bodyPr/>
+          <a:lstStyle/>
+          <a:p>
+            <a:pPr marL="0" indent="0" algn="l" fontAlgn="base">
+              <a:buNone/>
+            </a:pPr>
+            <a:r>
+              <a:rPr lang="en-IN" sz="2000" b="1" i="0" dirty="0">
+                <a:solidFill>
+                  <a:srgbClr val="273239"/>
+                </a:solidFill>
+                <a:effectLst/>
+                <a:latin typeface="Nunito" pitchFamily="2" charset="0"/>
+              </a:rPr>
+              <a:t>Memory Management</a:t>
+            </a:r>
+            <a:endParaRPr lang="en-IN" sz="2000" b="1" i="0" dirty="0">
+              <a:solidFill>
+                <a:srgbClr val="273239"/>
+              </a:solidFill>
+              <a:effectLst/>
+              <a:latin typeface="Nunito" pitchFamily="2" charset="0"/>
+            </a:endParaRPr>
+          </a:p>
+          <a:p>
+            <a:pPr marL="0" indent="0" algn="l" fontAlgn="base">
+              <a:buNone/>
+            </a:pPr>
+            <a:r>
+              <a:rPr lang="en-US" b="0" i="0" dirty="0">
+                <a:solidFill>
+                  <a:srgbClr val="273239"/>
+                </a:solidFill>
+                <a:effectLst/>
+                <a:latin typeface="Calibri" panose="020F0502020204030204" pitchFamily="34" charset="0"/>
+                <a:ea typeface="Calibri" panose="020F0502020204030204" pitchFamily="34" charset="0"/>
+                <a:cs typeface="Calibri" panose="020F0502020204030204" pitchFamily="34" charset="0"/>
+              </a:rPr>
+              <a:t>In a multiprogramming computer, the </a:t>
+            </a:r>
+            <a:r>
+              <a:rPr lang="en-US" b="0" i="0" u="sng" dirty="0">
+                <a:effectLst/>
+                <a:latin typeface="Calibri" panose="020F0502020204030204" pitchFamily="34" charset="0"/>
+                <a:ea typeface="Calibri" panose="020F0502020204030204" pitchFamily="34" charset="0"/>
+                <a:cs typeface="Calibri" panose="020F0502020204030204" pitchFamily="34" charset="0"/>
+              </a:rPr>
+              <a:t>Operating System</a:t>
+            </a:r>
+            <a:r>
+              <a:rPr lang="en-US" b="0" i="0" dirty="0">
+                <a:solidFill>
+                  <a:srgbClr val="273239"/>
+                </a:solidFill>
+                <a:effectLst/>
+                <a:latin typeface="Calibri" panose="020F0502020204030204" pitchFamily="34" charset="0"/>
+                <a:ea typeface="Calibri" panose="020F0502020204030204" pitchFamily="34" charset="0"/>
+                <a:cs typeface="Calibri" panose="020F0502020204030204" pitchFamily="34" charset="0"/>
+              </a:rPr>
+              <a:t> resides in a part of memory, and the rest is used by multiple processes. The task of subdividing the memory among different processes is called </a:t>
+            </a:r>
+            <a:r>
+              <a:rPr lang="en-US" b="1" i="0" dirty="0">
+                <a:solidFill>
+                  <a:srgbClr val="273239"/>
+                </a:solidFill>
+                <a:effectLst/>
+                <a:latin typeface="Calibri" panose="020F0502020204030204" pitchFamily="34" charset="0"/>
+                <a:ea typeface="Calibri" panose="020F0502020204030204" pitchFamily="34" charset="0"/>
+                <a:cs typeface="Calibri" panose="020F0502020204030204" pitchFamily="34" charset="0"/>
+              </a:rPr>
+              <a:t>Memory Management</a:t>
+            </a:r>
+            <a:r>
+              <a:rPr lang="en-IN" b="1" dirty="0">
+                <a:solidFill>
+                  <a:srgbClr val="273239"/>
+                </a:solidFill>
+                <a:latin typeface="Calibri" panose="020F0502020204030204" pitchFamily="34" charset="0"/>
+                <a:ea typeface="Calibri" panose="020F0502020204030204" pitchFamily="34" charset="0"/>
+                <a:cs typeface="Calibri" panose="020F0502020204030204" pitchFamily="34" charset="0"/>
+              </a:rPr>
+              <a:t>.</a:t>
+            </a:r>
+            <a:endParaRPr lang="en-IN" sz="2000" b="1" i="0" dirty="0">
+              <a:solidFill>
+                <a:srgbClr val="273239"/>
+              </a:solidFill>
+              <a:effectLst/>
+              <a:latin typeface="Calibri" panose="020F0502020204030204" pitchFamily="34" charset="0"/>
+              <a:ea typeface="Calibri" panose="020F0502020204030204" pitchFamily="34" charset="0"/>
+              <a:cs typeface="Calibri" panose="020F0502020204030204" pitchFamily="34" charset="0"/>
+            </a:endParaRPr>
+          </a:p>
+          <a:p>
+            <a:pPr marL="0" indent="0">
+              <a:buNone/>
+            </a:pPr>
+            <a:endParaRPr lang="en-IN" dirty="0"/>
+          </a:p>
+          <a:p>
+            <a:pPr marL="0" indent="0">
+              <a:buNone/>
+            </a:pPr>
+            <a:r>
+              <a:rPr lang="en-IN" dirty="0"/>
+              <a:t>Need of Memory Management</a:t>
+            </a:r>
+            <a:endParaRPr lang="en-IN" dirty="0"/>
+          </a:p>
+          <a:p>
+            <a:pPr marL="0" indent="0">
+              <a:buNone/>
+            </a:pPr>
+            <a:endParaRPr lang="en-IN" dirty="0"/>
+          </a:p>
+          <a:p>
+            <a:pPr algn="l" fontAlgn="base">
+              <a:buFont typeface="Wingdings" panose="05000000000000000000" pitchFamily="2" charset="2"/>
+              <a:buChar char="ü"/>
+            </a:pPr>
+            <a:r>
+              <a:rPr lang="en-US" b="0" i="0" dirty="0">
+                <a:solidFill>
+                  <a:srgbClr val="273239"/>
+                </a:solidFill>
+                <a:effectLst/>
+                <a:latin typeface="Calibri" panose="020F0502020204030204" pitchFamily="34" charset="0"/>
+                <a:ea typeface="Calibri" panose="020F0502020204030204" pitchFamily="34" charset="0"/>
+                <a:cs typeface="Calibri" panose="020F0502020204030204" pitchFamily="34" charset="0"/>
+              </a:rPr>
+              <a:t>Allocate and de-allocate memory before and after process execution.</a:t>
+            </a:r>
+            <a:endParaRPr lang="en-US" b="0" i="0" dirty="0">
+              <a:solidFill>
+                <a:srgbClr val="273239"/>
+              </a:solidFill>
+              <a:effectLst/>
+              <a:latin typeface="Calibri" panose="020F0502020204030204" pitchFamily="34" charset="0"/>
+              <a:ea typeface="Calibri" panose="020F0502020204030204" pitchFamily="34" charset="0"/>
+              <a:cs typeface="Calibri" panose="020F0502020204030204" pitchFamily="34" charset="0"/>
+            </a:endParaRPr>
+          </a:p>
+          <a:p>
+            <a:pPr algn="l" fontAlgn="base">
+              <a:buFont typeface="Wingdings" panose="05000000000000000000" pitchFamily="2" charset="2"/>
+              <a:buChar char="ü"/>
+            </a:pPr>
+            <a:r>
+              <a:rPr lang="en-US" b="0" i="0" dirty="0">
+                <a:solidFill>
+                  <a:srgbClr val="273239"/>
+                </a:solidFill>
+                <a:effectLst/>
+                <a:latin typeface="Calibri" panose="020F0502020204030204" pitchFamily="34" charset="0"/>
+                <a:ea typeface="Calibri" panose="020F0502020204030204" pitchFamily="34" charset="0"/>
+                <a:cs typeface="Calibri" panose="020F0502020204030204" pitchFamily="34" charset="0"/>
+              </a:rPr>
+              <a:t>To keep track of used memory space by processes.</a:t>
+            </a:r>
+            <a:endParaRPr lang="en-US" b="0" i="0" dirty="0">
+              <a:solidFill>
+                <a:srgbClr val="273239"/>
+              </a:solidFill>
+              <a:effectLst/>
+              <a:latin typeface="Calibri" panose="020F0502020204030204" pitchFamily="34" charset="0"/>
+              <a:ea typeface="Calibri" panose="020F0502020204030204" pitchFamily="34" charset="0"/>
+              <a:cs typeface="Calibri" panose="020F0502020204030204" pitchFamily="34" charset="0"/>
+            </a:endParaRPr>
+          </a:p>
+          <a:p>
+            <a:pPr algn="l" fontAlgn="base">
+              <a:buFont typeface="Wingdings" panose="05000000000000000000" pitchFamily="2" charset="2"/>
+              <a:buChar char="ü"/>
+            </a:pPr>
+            <a:r>
+              <a:rPr lang="en-US" b="0" i="0" dirty="0">
+                <a:solidFill>
+                  <a:srgbClr val="273239"/>
+                </a:solidFill>
+                <a:effectLst/>
+                <a:latin typeface="Calibri" panose="020F0502020204030204" pitchFamily="34" charset="0"/>
+                <a:ea typeface="Calibri" panose="020F0502020204030204" pitchFamily="34" charset="0"/>
+                <a:cs typeface="Calibri" panose="020F0502020204030204" pitchFamily="34" charset="0"/>
+              </a:rPr>
+              <a:t>To minimize </a:t>
+            </a:r>
+            <a:r>
+              <a:rPr lang="en-US" b="0" i="0" u="sng" dirty="0">
+                <a:solidFill>
+                  <a:srgbClr val="273239"/>
+                </a:solidFill>
+                <a:effectLst/>
+                <a:latin typeface="Calibri" panose="020F0502020204030204" pitchFamily="34" charset="0"/>
+                <a:ea typeface="Calibri" panose="020F0502020204030204" pitchFamily="34" charset="0"/>
+                <a:cs typeface="Calibri" panose="020F0502020204030204" pitchFamily="34" charset="0"/>
+              </a:rPr>
+              <a:t>fragmentation </a:t>
+            </a:r>
+            <a:r>
+              <a:rPr lang="en-US" b="0" i="0" dirty="0">
+                <a:solidFill>
+                  <a:srgbClr val="273239"/>
+                </a:solidFill>
+                <a:effectLst/>
+                <a:latin typeface="Calibri" panose="020F0502020204030204" pitchFamily="34" charset="0"/>
+                <a:ea typeface="Calibri" panose="020F0502020204030204" pitchFamily="34" charset="0"/>
+                <a:cs typeface="Calibri" panose="020F0502020204030204" pitchFamily="34" charset="0"/>
+              </a:rPr>
+              <a:t>issues.</a:t>
+            </a:r>
+            <a:endParaRPr lang="en-US" b="0" i="0" dirty="0">
+              <a:solidFill>
+                <a:srgbClr val="273239"/>
+              </a:solidFill>
+              <a:effectLst/>
+              <a:latin typeface="Calibri" panose="020F0502020204030204" pitchFamily="34" charset="0"/>
+              <a:ea typeface="Calibri" panose="020F0502020204030204" pitchFamily="34" charset="0"/>
+              <a:cs typeface="Calibri" panose="020F0502020204030204" pitchFamily="34" charset="0"/>
+            </a:endParaRPr>
+          </a:p>
+          <a:p>
+            <a:pPr algn="l" fontAlgn="base">
+              <a:buFont typeface="Wingdings" panose="05000000000000000000" pitchFamily="2" charset="2"/>
+              <a:buChar char="ü"/>
+            </a:pPr>
+            <a:r>
+              <a:rPr lang="en-US" b="0" i="0" dirty="0">
+                <a:solidFill>
+                  <a:srgbClr val="273239"/>
+                </a:solidFill>
+                <a:effectLst/>
+                <a:latin typeface="Calibri" panose="020F0502020204030204" pitchFamily="34" charset="0"/>
+                <a:ea typeface="Calibri" panose="020F0502020204030204" pitchFamily="34" charset="0"/>
+                <a:cs typeface="Calibri" panose="020F0502020204030204" pitchFamily="34" charset="0"/>
+              </a:rPr>
+              <a:t>To proper utilization of main memory.</a:t>
+            </a:r>
+            <a:endParaRPr lang="en-US" b="0" i="0" dirty="0">
+              <a:solidFill>
+                <a:srgbClr val="273239"/>
+              </a:solidFill>
+              <a:effectLst/>
+              <a:latin typeface="Calibri" panose="020F0502020204030204" pitchFamily="34" charset="0"/>
+              <a:ea typeface="Calibri" panose="020F0502020204030204" pitchFamily="34" charset="0"/>
+              <a:cs typeface="Calibri" panose="020F0502020204030204" pitchFamily="34" charset="0"/>
+            </a:endParaRPr>
+          </a:p>
+          <a:p>
+            <a:pPr algn="l" fontAlgn="base">
+              <a:buFont typeface="Wingdings" panose="05000000000000000000" pitchFamily="2" charset="2"/>
+              <a:buChar char="ü"/>
+            </a:pPr>
+            <a:r>
+              <a:rPr lang="en-US" b="0" i="0" dirty="0">
+                <a:solidFill>
+                  <a:srgbClr val="273239"/>
+                </a:solidFill>
+                <a:effectLst/>
+                <a:latin typeface="Calibri" panose="020F0502020204030204" pitchFamily="34" charset="0"/>
+                <a:ea typeface="Calibri" panose="020F0502020204030204" pitchFamily="34" charset="0"/>
+                <a:cs typeface="Calibri" panose="020F0502020204030204" pitchFamily="34" charset="0"/>
+              </a:rPr>
+              <a:t>To maintain data integrity while executing of process.</a:t>
+            </a:r>
+            <a:endParaRPr lang="en-US" b="0" i="0" dirty="0">
+              <a:solidFill>
+                <a:srgbClr val="273239"/>
+              </a:solidFill>
+              <a:effectLst/>
+              <a:latin typeface="Calibri" panose="020F0502020204030204" pitchFamily="34" charset="0"/>
+              <a:ea typeface="Calibri" panose="020F0502020204030204" pitchFamily="34" charset="0"/>
+              <a:cs typeface="Calibri" panose="020F0502020204030204" pitchFamily="34" charset="0"/>
+            </a:endParaRPr>
+          </a:p>
+          <a:p>
+            <a:pPr marL="0" indent="0">
+              <a:buNone/>
+            </a:pPr>
+            <a:endParaRPr lang="en-IN" dirty="0"/>
+          </a:p>
+        </p:txBody>
+      </p:sp>
+    </p:spTree>
+  </p:cSld>
+  <p:clrMapOvr>
+    <a:masterClrMapping/>
+  </p:clrMapOvr>
+</p:sld>
+</file>
+
+<file path=ppt/slides/slide40.xml><?xml version="1.0" encoding="utf-8"?>
+<p:sld xmlns:a="http://schemas.openxmlformats.org/drawingml/2006/main" xmlns:r="http://schemas.openxmlformats.org/officeDocument/2006/relationships" xmlns:p="http://schemas.openxmlformats.org/presentationml/2006/main">
+  <p:cSld>
+    <p:spTree>
+      <p:nvGrpSpPr>
+        <p:cNvPr id="1" name=""/>
+        <p:cNvGrpSpPr/>
+        <p:nvPr/>
+      </p:nvGrpSpPr>
+      <p:grpSpPr>
+        <a:xfrm>
+          <a:off x="0" y="0"/>
+          <a:ext cx="0" cy="0"/>
+          <a:chOff x="0" y="0"/>
+          <a:chExt cx="0" cy="0"/>
+        </a:xfrm>
+      </p:grpSpPr>
+      <p:sp>
+        <p:nvSpPr>
+          <p:cNvPr id="2" name="Title 1"/>
+          <p:cNvSpPr>
+            <a:spLocks noGrp="1"/>
+          </p:cNvSpPr>
+          <p:nvPr>
+            <p:ph type="title"/>
+          </p:nvPr>
+        </p:nvSpPr>
+        <p:spPr>
+          <a:xfrm>
+            <a:off x="1069848" y="484632"/>
+            <a:ext cx="10058400" cy="558356"/>
+          </a:xfrm>
+        </p:spPr>
+        <p:txBody>
+          <a:bodyPr>
+            <a:normAutofit fontScale="90000"/>
+          </a:bodyPr>
+          <a:lstStyle/>
+          <a:p>
+            <a:r>
+              <a:rPr lang="en-IN" dirty="0"/>
+              <a:t>MemORY MANAGEMENT</a:t>
+            </a:r>
+            <a:endParaRPr lang="en-IN" dirty="0"/>
+          </a:p>
+        </p:txBody>
+      </p:sp>
+      <p:sp>
+        <p:nvSpPr>
           <p:cNvPr id="4" name="AutoShape 2" descr="PAGING&#10;MEMORY MANAGEMENT                                       New Concept!!&#10;&#10;&#10;•   Logical address space of a process can be noncontiguous; process is&#10;    allocated physical memory whenever that memory is available and the&#10;    program needs it.&#10;•   Divide physical memory into fixed-sized blocks called frames (size is&#10;    power of 2, between 512 bytes and 8192 bytes).&#10;•   Divide logical memory into blocks of same size called pages.&#10;•   Keep track of all free frames.&#10;•   To run a program of size n pages, need to find n free frames and load&#10;    program.&#10;•   Set up a page table to translate logical to physical addresses.&#10;•   Internal fragmentation.&#10;&#10;&#10;&#10;                            8: Memory Management                     20&#10; "/>
           <p:cNvSpPr>
             <a:spLocks noChangeAspect="1" noChangeArrowheads="1"/>
@@ -15687,7 +17049,7 @@
 </p:sld>
 </file>
 
-<file path=ppt/slides/slide37.xml><?xml version="1.0" encoding="utf-8"?>
+<file path=ppt/slides/slide41.xml><?xml version="1.0" encoding="utf-8"?>
 <p:sld xmlns:a="http://schemas.openxmlformats.org/drawingml/2006/main" xmlns:r="http://schemas.openxmlformats.org/officeDocument/2006/relationships" xmlns:p="http://schemas.openxmlformats.org/presentationml/2006/main">
   <p:cSld>
     <p:spTree>
@@ -15861,7 +17223,1183 @@
 </p:sld>
 </file>
 
-<file path=ppt/slides/slide38.xml><?xml version="1.0" encoding="utf-8"?>
+<file path=ppt/slides/slide42.xml><?xml version="1.0" encoding="utf-8"?>
+<p:sld xmlns:a="http://schemas.openxmlformats.org/drawingml/2006/main" xmlns:r="http://schemas.openxmlformats.org/officeDocument/2006/relationships" xmlns:p="http://schemas.openxmlformats.org/presentationml/2006/main">
+  <p:cSld>
+    <p:spTree>
+      <p:nvGrpSpPr>
+        <p:cNvPr id="1" name=""/>
+        <p:cNvGrpSpPr/>
+        <p:nvPr/>
+      </p:nvGrpSpPr>
+      <p:grpSpPr/>
+      <p:sp>
+        <p:nvSpPr>
+          <p:cNvPr id="2" name="Rectangle 1"/>
+          <p:cNvSpPr/>
+          <p:nvPr/>
+        </p:nvSpPr>
+        <p:spPr>
+          <a:xfrm>
+            <a:off x="318" y="0"/>
+            <a:ext cx="12191695" cy="1051560"/>
+          </a:xfrm>
+          <a:prstGeom prst="rect">
+            <a:avLst/>
+          </a:prstGeom>
+          <a:solidFill>
+            <a:srgbClr val="13264A"/>
+          </a:solidFill>
+          <a:ln>
+            <a:noFill/>
+          </a:ln>
+        </p:spPr>
+        <p:style>
+          <a:lnRef idx="1">
+            <a:schemeClr val="accent1"/>
+          </a:lnRef>
+          <a:fillRef idx="3">
+            <a:schemeClr val="accent1"/>
+          </a:fillRef>
+          <a:effectRef idx="2">
+            <a:schemeClr val="accent1"/>
+          </a:effectRef>
+          <a:fontRef idx="minor">
+            <a:schemeClr val="lt1"/>
+          </a:fontRef>
+        </p:style>
+        <p:txBody>
+          <a:bodyPr rtlCol="0" anchor="ctr"/>
+          <a:lstStyle/>
+          <a:p>
+            <a:pPr algn="ctr"/>
+          </a:p>
+        </p:txBody>
+      </p:sp>
+      <p:sp>
+        <p:nvSpPr>
+          <p:cNvPr id="3" name="TextBox 2"/>
+          <p:cNvSpPr txBox="1"/>
+          <p:nvPr/>
+        </p:nvSpPr>
+        <p:spPr>
+          <a:xfrm>
+            <a:off x="503238" y="164592"/>
+            <a:ext cx="4189095" cy="506730"/>
+          </a:xfrm>
+          <a:prstGeom prst="rect">
+            <a:avLst/>
+          </a:prstGeom>
+          <a:noFill/>
+        </p:spPr>
+        <p:txBody>
+          <a:bodyPr wrap="none">
+            <a:spAutoFit/>
+          </a:bodyPr>
+          <a:lstStyle/>
+          <a:p>
+            <a:pPr>
+              <a:defRPr sz="2700" b="1">
+                <a:solidFill>
+                  <a:srgbClr val="FFFFFF"/>
+                </a:solidFill>
+                <a:latin typeface="Aptos Display"/>
+              </a:defRPr>
+            </a:pPr>
+            <a:r>
+              <a:t>TERMS AND MEANINGS</a:t>
+            </a:r>
+          </a:p>
+        </p:txBody>
+      </p:sp>
+      <p:sp>
+        <p:nvSpPr>
+          <p:cNvPr id="4" name="TextBox 3"/>
+          <p:cNvSpPr txBox="1"/>
+          <p:nvPr/>
+        </p:nvSpPr>
+        <p:spPr>
+          <a:xfrm>
+            <a:off x="567246" y="1207008"/>
+            <a:ext cx="6510020" cy="337185"/>
+          </a:xfrm>
+          <a:prstGeom prst="rect">
+            <a:avLst/>
+          </a:prstGeom>
+          <a:noFill/>
+        </p:spPr>
+        <p:txBody>
+          <a:bodyPr wrap="none">
+            <a:spAutoFit/>
+          </a:bodyPr>
+          <a:lstStyle/>
+          <a:p>
+            <a:pPr>
+              <a:defRPr sz="1600">
+                <a:solidFill>
+                  <a:srgbClr val="5B697C"/>
+                </a:solidFill>
+                <a:latin typeface="Aptos"/>
+              </a:defRPr>
+            </a:pPr>
+            <a:r>
+              <a:t>Effective Access Time (EAT) with a Translation Lookaside Buffer (TLB)</a:t>
+            </a:r>
+          </a:p>
+        </p:txBody>
+      </p:sp>
+      <p:sp>
+        <p:nvSpPr>
+          <p:cNvPr id="5" name="Rounded Rectangle 4"/>
+          <p:cNvSpPr/>
+          <p:nvPr/>
+        </p:nvSpPr>
+        <p:spPr>
+          <a:xfrm>
+            <a:off x="548958" y="1691640"/>
+            <a:ext cx="11064240" cy="914400"/>
+          </a:xfrm>
+          <a:prstGeom prst="roundRect">
+            <a:avLst/>
+          </a:prstGeom>
+          <a:solidFill>
+            <a:srgbClr val="F1F6FD"/>
+          </a:solidFill>
+          <a:ln>
+            <a:solidFill>
+              <a:srgbClr val="D4E0F0"/>
+            </a:solidFill>
+          </a:ln>
+        </p:spPr>
+        <p:style>
+          <a:lnRef idx="1">
+            <a:schemeClr val="accent1"/>
+          </a:lnRef>
+          <a:fillRef idx="3">
+            <a:schemeClr val="accent1"/>
+          </a:fillRef>
+          <a:effectRef idx="2">
+            <a:schemeClr val="accent1"/>
+          </a:effectRef>
+          <a:fontRef idx="minor">
+            <a:schemeClr val="lt1"/>
+          </a:fontRef>
+        </p:style>
+        <p:txBody>
+          <a:bodyPr rtlCol="0" anchor="ctr"/>
+          <a:lstStyle/>
+          <a:p>
+            <a:pPr algn="ctr">
+              <a:defRPr sz="2500" b="1">
+                <a:solidFill>
+                  <a:srgbClr val="13264A"/>
+                </a:solidFill>
+                <a:latin typeface="Aptos Display"/>
+              </a:defRPr>
+            </a:pPr>
+            <a:r>
+              <a:t>EAT = h(t + m) + (1 − h)[t + (L + 1)m]</a:t>
+            </a:r>
+          </a:p>
+        </p:txBody>
+      </p:sp>
+      <p:sp>
+        <p:nvSpPr>
+          <p:cNvPr id="6" name="Rounded Rectangle 5"/>
+          <p:cNvSpPr/>
+          <p:nvPr/>
+        </p:nvSpPr>
+        <p:spPr>
+          <a:xfrm>
+            <a:off x="548958" y="2880360"/>
+            <a:ext cx="3474720" cy="1234440"/>
+          </a:xfrm>
+          <a:prstGeom prst="roundRect">
+            <a:avLst/>
+          </a:prstGeom>
+          <a:solidFill>
+            <a:srgbClr val="FFFFFF"/>
+          </a:solidFill>
+          <a:ln>
+            <a:solidFill>
+              <a:srgbClr val="DCE4EE"/>
+            </a:solidFill>
+          </a:ln>
+        </p:spPr>
+        <p:style>
+          <a:lnRef idx="1">
+            <a:schemeClr val="accent1"/>
+          </a:lnRef>
+          <a:fillRef idx="3">
+            <a:schemeClr val="accent1"/>
+          </a:fillRef>
+          <a:effectRef idx="2">
+            <a:schemeClr val="accent1"/>
+          </a:effectRef>
+          <a:fontRef idx="minor">
+            <a:schemeClr val="lt1"/>
+          </a:fontRef>
+        </p:style>
+        <p:txBody>
+          <a:bodyPr lIns="164592" tIns="91440" rIns="164592" rtlCol="0" anchor="ctr"/>
+          <a:lstStyle/>
+          <a:p>
+            <a:pPr algn="ctr">
+              <a:spcAft>
+                <a:spcPts val="600"/>
+              </a:spcAft>
+              <a:defRPr sz="1500" b="1">
+                <a:solidFill>
+                  <a:srgbClr val="118580"/>
+                </a:solidFill>
+                <a:latin typeface="Aptos"/>
+              </a:defRPr>
+            </a:pPr>
+            <a:r>
+              <a:t>EAT — Effective Access Time</a:t>
+            </a:r>
+          </a:p>
+          <a:p>
+            <a:pPr>
+              <a:defRPr sz="1200">
+                <a:solidFill>
+                  <a:srgbClr val="26303E"/>
+                </a:solidFill>
+                <a:latin typeface="Aptos"/>
+              </a:defRPr>
+            </a:pPr>
+            <a:r>
+              <a:t>Average time needed to access memory.</a:t>
+            </a:r>
+          </a:p>
+        </p:txBody>
+      </p:sp>
+      <p:sp>
+        <p:nvSpPr>
+          <p:cNvPr id="7" name="Rounded Rectangle 6"/>
+          <p:cNvSpPr/>
+          <p:nvPr/>
+        </p:nvSpPr>
+        <p:spPr>
+          <a:xfrm>
+            <a:off x="4343718" y="2880360"/>
+            <a:ext cx="3474720" cy="1234440"/>
+          </a:xfrm>
+          <a:prstGeom prst="roundRect">
+            <a:avLst/>
+          </a:prstGeom>
+          <a:solidFill>
+            <a:srgbClr val="FFFFFF"/>
+          </a:solidFill>
+          <a:ln>
+            <a:solidFill>
+              <a:srgbClr val="DCE4EE"/>
+            </a:solidFill>
+          </a:ln>
+        </p:spPr>
+        <p:style>
+          <a:lnRef idx="1">
+            <a:schemeClr val="accent1"/>
+          </a:lnRef>
+          <a:fillRef idx="3">
+            <a:schemeClr val="accent1"/>
+          </a:fillRef>
+          <a:effectRef idx="2">
+            <a:schemeClr val="accent1"/>
+          </a:effectRef>
+          <a:fontRef idx="minor">
+            <a:schemeClr val="lt1"/>
+          </a:fontRef>
+        </p:style>
+        <p:txBody>
+          <a:bodyPr lIns="164592" tIns="91440" rIns="164592" rtlCol="0" anchor="ctr"/>
+          <a:lstStyle/>
+          <a:p>
+            <a:pPr algn="ctr">
+              <a:spcAft>
+                <a:spcPts val="600"/>
+              </a:spcAft>
+              <a:defRPr sz="1500" b="1">
+                <a:solidFill>
+                  <a:srgbClr val="2D60AA"/>
+                </a:solidFill>
+                <a:latin typeface="Aptos"/>
+              </a:defRPr>
+            </a:pPr>
+            <a:r>
+              <a:t>h — TLB Hit Ratio</a:t>
+            </a:r>
+          </a:p>
+          <a:p>
+            <a:pPr>
+              <a:defRPr sz="1200">
+                <a:solidFill>
+                  <a:srgbClr val="26303E"/>
+                </a:solidFill>
+                <a:latin typeface="Aptos"/>
+              </a:defRPr>
+            </a:pPr>
+            <a:r>
+              <a:t>Fraction / percentage of lookups found in the TLB.</a:t>
+            </a:r>
+          </a:p>
+        </p:txBody>
+      </p:sp>
+      <p:sp>
+        <p:nvSpPr>
+          <p:cNvPr id="8" name="Rounded Rectangle 7"/>
+          <p:cNvSpPr/>
+          <p:nvPr/>
+        </p:nvSpPr>
+        <p:spPr>
+          <a:xfrm>
+            <a:off x="8138478" y="2880360"/>
+            <a:ext cx="3474720" cy="1234440"/>
+          </a:xfrm>
+          <a:prstGeom prst="roundRect">
+            <a:avLst/>
+          </a:prstGeom>
+          <a:solidFill>
+            <a:srgbClr val="FFFFFF"/>
+          </a:solidFill>
+          <a:ln>
+            <a:solidFill>
+              <a:srgbClr val="DCE4EE"/>
+            </a:solidFill>
+          </a:ln>
+        </p:spPr>
+        <p:style>
+          <a:lnRef idx="1">
+            <a:schemeClr val="accent1"/>
+          </a:lnRef>
+          <a:fillRef idx="3">
+            <a:schemeClr val="accent1"/>
+          </a:fillRef>
+          <a:effectRef idx="2">
+            <a:schemeClr val="accent1"/>
+          </a:effectRef>
+          <a:fontRef idx="minor">
+            <a:schemeClr val="lt1"/>
+          </a:fontRef>
+        </p:style>
+        <p:txBody>
+          <a:bodyPr lIns="164592" tIns="91440" rIns="164592" rtlCol="0" anchor="ctr"/>
+          <a:lstStyle/>
+          <a:p>
+            <a:pPr algn="ctr">
+              <a:spcAft>
+                <a:spcPts val="600"/>
+              </a:spcAft>
+              <a:defRPr sz="1500" b="1">
+                <a:solidFill>
+                  <a:srgbClr val="E59137"/>
+                </a:solidFill>
+                <a:latin typeface="Aptos"/>
+              </a:defRPr>
+            </a:pPr>
+            <a:r>
+              <a:t>t — TLB Lookup Time</a:t>
+            </a:r>
+          </a:p>
+          <a:p>
+            <a:pPr>
+              <a:defRPr sz="1200">
+                <a:solidFill>
+                  <a:srgbClr val="26303E"/>
+                </a:solidFill>
+                <a:latin typeface="Aptos"/>
+              </a:defRPr>
+            </a:pPr>
+            <a:r>
+              <a:t>Time taken to search the TLB.</a:t>
+            </a:r>
+          </a:p>
+        </p:txBody>
+      </p:sp>
+      <p:sp>
+        <p:nvSpPr>
+          <p:cNvPr id="9" name="Rounded Rectangle 8"/>
+          <p:cNvSpPr/>
+          <p:nvPr/>
+        </p:nvSpPr>
+        <p:spPr>
+          <a:xfrm>
+            <a:off x="548958" y="4343400"/>
+            <a:ext cx="3474720" cy="1234440"/>
+          </a:xfrm>
+          <a:prstGeom prst="roundRect">
+            <a:avLst/>
+          </a:prstGeom>
+          <a:solidFill>
+            <a:srgbClr val="FFFFFF"/>
+          </a:solidFill>
+          <a:ln>
+            <a:solidFill>
+              <a:srgbClr val="DCE4EE"/>
+            </a:solidFill>
+          </a:ln>
+        </p:spPr>
+        <p:style>
+          <a:lnRef idx="1">
+            <a:schemeClr val="accent1"/>
+          </a:lnRef>
+          <a:fillRef idx="3">
+            <a:schemeClr val="accent1"/>
+          </a:fillRef>
+          <a:effectRef idx="2">
+            <a:schemeClr val="accent1"/>
+          </a:effectRef>
+          <a:fontRef idx="minor">
+            <a:schemeClr val="lt1"/>
+          </a:fontRef>
+        </p:style>
+        <p:txBody>
+          <a:bodyPr lIns="164592" tIns="91440" rIns="164592" rtlCol="0" anchor="ctr"/>
+          <a:lstStyle/>
+          <a:p>
+            <a:pPr algn="ctr">
+              <a:spcAft>
+                <a:spcPts val="600"/>
+              </a:spcAft>
+              <a:defRPr sz="1500" b="1">
+                <a:solidFill>
+                  <a:srgbClr val="118580"/>
+                </a:solidFill>
+                <a:latin typeface="Aptos"/>
+              </a:defRPr>
+            </a:pPr>
+            <a:r>
+              <a:t>m — Memory Access Time</a:t>
+            </a:r>
+          </a:p>
+          <a:p>
+            <a:pPr>
+              <a:defRPr sz="1200">
+                <a:solidFill>
+                  <a:srgbClr val="26303E"/>
+                </a:solidFill>
+                <a:latin typeface="Aptos"/>
+              </a:defRPr>
+            </a:pPr>
+            <a:r>
+              <a:t>Time for one access to main memory.</a:t>
+            </a:r>
+          </a:p>
+        </p:txBody>
+      </p:sp>
+      <p:sp>
+        <p:nvSpPr>
+          <p:cNvPr id="10" name="Rounded Rectangle 9"/>
+          <p:cNvSpPr/>
+          <p:nvPr/>
+        </p:nvSpPr>
+        <p:spPr>
+          <a:xfrm>
+            <a:off x="4343718" y="4343400"/>
+            <a:ext cx="3474720" cy="1234440"/>
+          </a:xfrm>
+          <a:prstGeom prst="roundRect">
+            <a:avLst/>
+          </a:prstGeom>
+          <a:solidFill>
+            <a:srgbClr val="FFFFFF"/>
+          </a:solidFill>
+          <a:ln>
+            <a:solidFill>
+              <a:srgbClr val="DCE4EE"/>
+            </a:solidFill>
+          </a:ln>
+        </p:spPr>
+        <p:style>
+          <a:lnRef idx="1">
+            <a:schemeClr val="accent1"/>
+          </a:lnRef>
+          <a:fillRef idx="3">
+            <a:schemeClr val="accent1"/>
+          </a:fillRef>
+          <a:effectRef idx="2">
+            <a:schemeClr val="accent1"/>
+          </a:effectRef>
+          <a:fontRef idx="minor">
+            <a:schemeClr val="lt1"/>
+          </a:fontRef>
+        </p:style>
+        <p:txBody>
+          <a:bodyPr lIns="164592" tIns="91440" rIns="164592" rtlCol="0" anchor="ctr"/>
+          <a:lstStyle/>
+          <a:p>
+            <a:pPr algn="ctr">
+              <a:spcAft>
+                <a:spcPts val="600"/>
+              </a:spcAft>
+              <a:defRPr sz="1500" b="1">
+                <a:solidFill>
+                  <a:srgbClr val="2D60AA"/>
+                </a:solidFill>
+                <a:latin typeface="Aptos"/>
+              </a:defRPr>
+            </a:pPr>
+            <a:r>
+              <a:t>L — Page-Table Levels</a:t>
+            </a:r>
+          </a:p>
+          <a:p>
+            <a:pPr>
+              <a:defRPr sz="1200">
+                <a:solidFill>
+                  <a:srgbClr val="26303E"/>
+                </a:solidFill>
+                <a:latin typeface="Aptos"/>
+              </a:defRPr>
+            </a:pPr>
+            <a:r>
+              <a:t>Number of levels in the page table.</a:t>
+            </a:r>
+          </a:p>
+        </p:txBody>
+      </p:sp>
+      <p:sp>
+        <p:nvSpPr>
+          <p:cNvPr id="11" name="Rounded Rectangle 10"/>
+          <p:cNvSpPr/>
+          <p:nvPr/>
+        </p:nvSpPr>
+        <p:spPr>
+          <a:xfrm>
+            <a:off x="8138478" y="4343400"/>
+            <a:ext cx="3474720" cy="1234440"/>
+          </a:xfrm>
+          <a:prstGeom prst="roundRect">
+            <a:avLst/>
+          </a:prstGeom>
+          <a:solidFill>
+            <a:srgbClr val="FFFFFF"/>
+          </a:solidFill>
+          <a:ln>
+            <a:solidFill>
+              <a:srgbClr val="DCE4EE"/>
+            </a:solidFill>
+          </a:ln>
+        </p:spPr>
+        <p:style>
+          <a:lnRef idx="1">
+            <a:schemeClr val="accent1"/>
+          </a:lnRef>
+          <a:fillRef idx="3">
+            <a:schemeClr val="accent1"/>
+          </a:fillRef>
+          <a:effectRef idx="2">
+            <a:schemeClr val="accent1"/>
+          </a:effectRef>
+          <a:fontRef idx="minor">
+            <a:schemeClr val="lt1"/>
+          </a:fontRef>
+        </p:style>
+        <p:txBody>
+          <a:bodyPr lIns="164592" tIns="91440" rIns="164592" rtlCol="0" anchor="ctr"/>
+          <a:lstStyle/>
+          <a:p>
+            <a:pPr algn="ctr">
+              <a:spcAft>
+                <a:spcPts val="600"/>
+              </a:spcAft>
+              <a:defRPr sz="1500" b="1">
+                <a:solidFill>
+                  <a:srgbClr val="E59137"/>
+                </a:solidFill>
+                <a:latin typeface="Aptos"/>
+              </a:defRPr>
+            </a:pPr>
+            <a:r>
+              <a:t>TLB — Translation Lookaside Buffer</a:t>
+            </a:r>
+          </a:p>
+          <a:p>
+            <a:pPr>
+              <a:defRPr sz="1200">
+                <a:solidFill>
+                  <a:srgbClr val="26303E"/>
+                </a:solidFill>
+                <a:latin typeface="Aptos"/>
+              </a:defRPr>
+            </a:pPr>
+            <a:r>
+              <a:t>A small, fast cache of recent address translations.</a:t>
+            </a:r>
+          </a:p>
+        </p:txBody>
+      </p:sp>
+      <p:sp>
+        <p:nvSpPr>
+          <p:cNvPr id="12" name="TextBox 11"/>
+          <p:cNvSpPr txBox="1"/>
+          <p:nvPr/>
+        </p:nvSpPr>
+        <p:spPr>
+          <a:xfrm>
+            <a:off x="594678" y="5925312"/>
+            <a:ext cx="7392035" cy="306705"/>
+          </a:xfrm>
+          <a:prstGeom prst="rect">
+            <a:avLst/>
+          </a:prstGeom>
+          <a:noFill/>
+        </p:spPr>
+        <p:txBody>
+          <a:bodyPr wrap="none">
+            <a:spAutoFit/>
+          </a:bodyPr>
+          <a:lstStyle/>
+          <a:p>
+            <a:pPr>
+              <a:defRPr sz="1400" b="1">
+                <a:solidFill>
+                  <a:srgbClr val="13264A"/>
+                </a:solidFill>
+                <a:latin typeface="Aptos"/>
+              </a:defRPr>
+            </a:pPr>
+            <a:r>
+              <a:t>Quick memory tip: hit = translation found in TLB; miss = page table must be checked.</a:t>
+            </a:r>
+          </a:p>
+        </p:txBody>
+      </p:sp>
+    </p:spTree>
+  </p:cSld>
+  <p:clrMapOvr>
+    <a:masterClrMapping/>
+  </p:clrMapOvr>
+</p:sld>
+</file>
+
+<file path=ppt/slides/slide43.xml><?xml version="1.0" encoding="utf-8"?>
+<p:sld xmlns:a="http://schemas.openxmlformats.org/drawingml/2006/main" xmlns:r="http://schemas.openxmlformats.org/officeDocument/2006/relationships" xmlns:p="http://schemas.openxmlformats.org/presentationml/2006/main">
+  <p:cSld>
+    <p:spTree>
+      <p:nvGrpSpPr>
+        <p:cNvPr id="1" name=""/>
+        <p:cNvGrpSpPr/>
+        <p:nvPr/>
+      </p:nvGrpSpPr>
+      <p:grpSpPr/>
+      <p:sp>
+        <p:nvSpPr>
+          <p:cNvPr id="2" name="Rectangle 1"/>
+          <p:cNvSpPr/>
+          <p:nvPr/>
+        </p:nvSpPr>
+        <p:spPr>
+          <a:xfrm>
+            <a:off x="318" y="0"/>
+            <a:ext cx="12191695" cy="1051560"/>
+          </a:xfrm>
+          <a:prstGeom prst="rect">
+            <a:avLst/>
+          </a:prstGeom>
+          <a:solidFill>
+            <a:srgbClr val="13264A"/>
+          </a:solidFill>
+          <a:ln>
+            <a:noFill/>
+          </a:ln>
+        </p:spPr>
+        <p:style>
+          <a:lnRef idx="1">
+            <a:schemeClr val="accent1"/>
+          </a:lnRef>
+          <a:fillRef idx="3">
+            <a:schemeClr val="accent1"/>
+          </a:fillRef>
+          <a:effectRef idx="2">
+            <a:schemeClr val="accent1"/>
+          </a:effectRef>
+          <a:fontRef idx="minor">
+            <a:schemeClr val="lt1"/>
+          </a:fontRef>
+        </p:style>
+        <p:txBody>
+          <a:bodyPr rtlCol="0" anchor="ctr"/>
+          <a:lstStyle/>
+          <a:p>
+            <a:pPr algn="ctr"/>
+          </a:p>
+        </p:txBody>
+      </p:sp>
+      <p:sp>
+        <p:nvSpPr>
+          <p:cNvPr id="3" name="TextBox 2"/>
+          <p:cNvSpPr txBox="1"/>
+          <p:nvPr/>
+        </p:nvSpPr>
+        <p:spPr>
+          <a:xfrm>
+            <a:off x="503238" y="164592"/>
+            <a:ext cx="5541010" cy="506730"/>
+          </a:xfrm>
+          <a:prstGeom prst="rect">
+            <a:avLst/>
+          </a:prstGeom>
+          <a:noFill/>
+        </p:spPr>
+        <p:txBody>
+          <a:bodyPr wrap="none">
+            <a:spAutoFit/>
+          </a:bodyPr>
+          <a:lstStyle/>
+          <a:p>
+            <a:pPr>
+              <a:defRPr sz="2700" b="1">
+                <a:solidFill>
+                  <a:srgbClr val="FFFFFF"/>
+                </a:solidFill>
+                <a:latin typeface="Aptos Display"/>
+              </a:defRPr>
+            </a:pPr>
+            <a:r>
+              <a:t> EFFECTIVE ACCESS TIME (EAT)</a:t>
+            </a:r>
+          </a:p>
+        </p:txBody>
+      </p:sp>
+      <p:sp>
+        <p:nvSpPr>
+          <p:cNvPr id="4" name="TextBox 3"/>
+          <p:cNvSpPr txBox="1"/>
+          <p:nvPr/>
+        </p:nvSpPr>
+        <p:spPr>
+          <a:xfrm>
+            <a:off x="567246" y="1207008"/>
+            <a:ext cx="7410450" cy="337185"/>
+          </a:xfrm>
+          <a:prstGeom prst="rect">
+            <a:avLst/>
+          </a:prstGeom>
+          <a:noFill/>
+        </p:spPr>
+        <p:txBody>
+          <a:bodyPr wrap="none">
+            <a:spAutoFit/>
+          </a:bodyPr>
+          <a:lstStyle/>
+          <a:p>
+            <a:pPr>
+              <a:defRPr sz="1600">
+                <a:solidFill>
+                  <a:srgbClr val="5B697C"/>
+                </a:solidFill>
+                <a:latin typeface="Aptos"/>
+              </a:defRPr>
+            </a:pPr>
+            <a:r>
+              <a:t>How fast is memory access when a Translation Lookaside Buffer (TLB) is used?</a:t>
+            </a:r>
+          </a:p>
+        </p:txBody>
+      </p:sp>
+      <p:sp>
+        <p:nvSpPr>
+          <p:cNvPr id="5" name="Rounded Rectangle 4"/>
+          <p:cNvSpPr/>
+          <p:nvPr/>
+        </p:nvSpPr>
+        <p:spPr>
+          <a:xfrm>
+            <a:off x="503238" y="1719072"/>
+            <a:ext cx="11155680" cy="1234440"/>
+          </a:xfrm>
+          <a:prstGeom prst="roundRect">
+            <a:avLst/>
+          </a:prstGeom>
+          <a:solidFill>
+            <a:srgbClr val="F0F5FC"/>
+          </a:solidFill>
+          <a:ln>
+            <a:solidFill>
+              <a:srgbClr val="D4E0F0"/>
+            </a:solidFill>
+          </a:ln>
+        </p:spPr>
+        <p:style>
+          <a:lnRef idx="1">
+            <a:schemeClr val="accent1"/>
+          </a:lnRef>
+          <a:fillRef idx="3">
+            <a:schemeClr val="accent1"/>
+          </a:fillRef>
+          <a:effectRef idx="2">
+            <a:schemeClr val="accent1"/>
+          </a:effectRef>
+          <a:fontRef idx="minor">
+            <a:schemeClr val="lt1"/>
+          </a:fontRef>
+        </p:style>
+        <p:txBody>
+          <a:bodyPr lIns="228600" tIns="128016" rIns="228600" rtlCol="0" anchor="ctr"/>
+          <a:lstStyle/>
+          <a:p>
+            <a:pPr algn="ctr">
+              <a:defRPr sz="2600" b="1">
+                <a:solidFill>
+                  <a:srgbClr val="13264A"/>
+                </a:solidFill>
+                <a:latin typeface="Aptos Display"/>
+              </a:defRPr>
+            </a:pPr>
+            <a:r>
+              <a:t>EAT = h(t + m) + (1 − h)[t + (L + 1)m]</a:t>
+            </a:r>
+          </a:p>
+          <a:p>
+            <a:pPr algn="ctr">
+              <a:defRPr sz="1500">
+                <a:solidFill>
+                  <a:srgbClr val="2D60AA"/>
+                </a:solidFill>
+                <a:latin typeface="Aptos"/>
+              </a:defRPr>
+            </a:pPr>
+            <a:r>
+              <a:t>Hit case: t + m     |     Miss case: t + (L + 1)m</a:t>
+            </a:r>
+          </a:p>
+        </p:txBody>
+      </p:sp>
+      <p:sp>
+        <p:nvSpPr>
+          <p:cNvPr id="6" name="Rounded Rectangle 5"/>
+          <p:cNvSpPr/>
+          <p:nvPr/>
+        </p:nvSpPr>
+        <p:spPr>
+          <a:xfrm>
+            <a:off x="503238" y="3218688"/>
+            <a:ext cx="3794760" cy="2606040"/>
+          </a:xfrm>
+          <a:prstGeom prst="roundRect">
+            <a:avLst/>
+          </a:prstGeom>
+          <a:solidFill>
+            <a:srgbClr val="FFFFFF"/>
+          </a:solidFill>
+          <a:ln>
+            <a:solidFill>
+              <a:srgbClr val="DCE4EE"/>
+            </a:solidFill>
+          </a:ln>
+        </p:spPr>
+        <p:style>
+          <a:lnRef idx="1">
+            <a:schemeClr val="accent1"/>
+          </a:lnRef>
+          <a:fillRef idx="3">
+            <a:schemeClr val="accent1"/>
+          </a:fillRef>
+          <a:effectRef idx="2">
+            <a:schemeClr val="accent1"/>
+          </a:effectRef>
+          <a:fontRef idx="minor">
+            <a:schemeClr val="lt1"/>
+          </a:fontRef>
+        </p:style>
+        <p:txBody>
+          <a:bodyPr lIns="228600" tIns="164592" rtlCol="0" anchor="ctr"/>
+          <a:lstStyle/>
+          <a:p>
+            <a:pPr algn="ctr">
+              <a:defRPr sz="1600" b="1">
+                <a:solidFill>
+                  <a:srgbClr val="118580"/>
+                </a:solidFill>
+              </a:defRPr>
+            </a:pPr>
+            <a:r>
+              <a:t>WHAT THE SYMBOLS MEAN</a:t>
+            </a:r>
+          </a:p>
+          <a:p>
+            <a:pPr>
+              <a:spcBef>
+                <a:spcPts val="800"/>
+              </a:spcBef>
+              <a:defRPr sz="1500">
+                <a:solidFill>
+                  <a:srgbClr val="26303E"/>
+                </a:solidFill>
+                <a:latin typeface="Aptos"/>
+              </a:defRPr>
+            </a:pPr>
+            <a:r>
+              <a:t>•  h = TLB hit ratio</a:t>
+            </a:r>
+          </a:p>
+          <a:p>
+            <a:pPr>
+              <a:spcBef>
+                <a:spcPts val="800"/>
+              </a:spcBef>
+              <a:defRPr sz="1500">
+                <a:solidFill>
+                  <a:srgbClr val="26303E"/>
+                </a:solidFill>
+                <a:latin typeface="Aptos"/>
+              </a:defRPr>
+            </a:pPr>
+            <a:r>
+              <a:t>•  t = TLB lookup time</a:t>
+            </a:r>
+          </a:p>
+          <a:p>
+            <a:pPr>
+              <a:spcBef>
+                <a:spcPts val="800"/>
+              </a:spcBef>
+              <a:defRPr sz="1500">
+                <a:solidFill>
+                  <a:srgbClr val="26303E"/>
+                </a:solidFill>
+                <a:latin typeface="Aptos"/>
+              </a:defRPr>
+            </a:pPr>
+            <a:r>
+              <a:t>•  m = one memory access time</a:t>
+            </a:r>
+          </a:p>
+          <a:p>
+            <a:pPr>
+              <a:spcBef>
+                <a:spcPts val="800"/>
+              </a:spcBef>
+              <a:defRPr sz="1500">
+                <a:solidFill>
+                  <a:srgbClr val="26303E"/>
+                </a:solidFill>
+                <a:latin typeface="Aptos"/>
+              </a:defRPr>
+            </a:pPr>
+            <a:r>
+              <a:t>•  L = number of page-table levels</a:t>
+            </a:r>
+          </a:p>
+        </p:txBody>
+      </p:sp>
+      <p:sp>
+        <p:nvSpPr>
+          <p:cNvPr id="7" name="Rounded Rectangle 6"/>
+          <p:cNvSpPr/>
+          <p:nvPr/>
+        </p:nvSpPr>
+        <p:spPr>
+          <a:xfrm>
+            <a:off x="4526598" y="3218688"/>
+            <a:ext cx="7132320" cy="2606040"/>
+          </a:xfrm>
+          <a:prstGeom prst="roundRect">
+            <a:avLst/>
+          </a:prstGeom>
+          <a:solidFill>
+            <a:srgbClr val="FFFFFF"/>
+          </a:solidFill>
+          <a:ln>
+            <a:solidFill>
+              <a:srgbClr val="DCE4EE"/>
+            </a:solidFill>
+          </a:ln>
+        </p:spPr>
+        <p:style>
+          <a:lnRef idx="1">
+            <a:schemeClr val="accent1"/>
+          </a:lnRef>
+          <a:fillRef idx="3">
+            <a:schemeClr val="accent1"/>
+          </a:fillRef>
+          <a:effectRef idx="2">
+            <a:schemeClr val="accent1"/>
+          </a:effectRef>
+          <a:fontRef idx="minor">
+            <a:schemeClr val="lt1"/>
+          </a:fontRef>
+        </p:style>
+        <p:txBody>
+          <a:bodyPr lIns="256032" tIns="146304" rIns="201168" rtlCol="0" anchor="ctr"/>
+          <a:lstStyle/>
+          <a:p>
+            <a:pPr algn="ctr">
+              <a:defRPr sz="1600" b="1">
+                <a:solidFill>
+                  <a:srgbClr val="E59137"/>
+                </a:solidFill>
+              </a:defRPr>
+            </a:pPr>
+            <a:r>
+              <a:t>CASE EXAMPLE</a:t>
+            </a:r>
+          </a:p>
+          <a:p>
+            <a:pPr>
+              <a:spcBef>
+                <a:spcPts val="500"/>
+              </a:spcBef>
+              <a:defRPr sz="1400">
+                <a:solidFill>
+                  <a:srgbClr val="26303E"/>
+                </a:solidFill>
+                <a:latin typeface="Aptos"/>
+              </a:defRPr>
+            </a:pPr>
+            <a:r>
+              <a:t>Given: t = 20 ns, m = 100 ns, h = 80% = 0.8, L = 1</a:t>
+            </a:r>
+          </a:p>
+          <a:p>
+            <a:pPr>
+              <a:spcBef>
+                <a:spcPts val="500"/>
+              </a:spcBef>
+              <a:defRPr sz="1400">
+                <a:solidFill>
+                  <a:srgbClr val="26303E"/>
+                </a:solidFill>
+                <a:latin typeface="Aptos"/>
+              </a:defRPr>
+            </a:pPr>
+            <a:r>
+              <a:t>TLB hit time = t + m = 20 + 100 = 120 ns</a:t>
+            </a:r>
+          </a:p>
+          <a:p>
+            <a:pPr>
+              <a:spcBef>
+                <a:spcPts val="500"/>
+              </a:spcBef>
+              <a:defRPr sz="1400">
+                <a:solidFill>
+                  <a:srgbClr val="26303E"/>
+                </a:solidFill>
+                <a:latin typeface="Aptos"/>
+              </a:defRPr>
+            </a:pPr>
+            <a:r>
+              <a:t>TLB miss time = t + (L + 1)m = 20 + (1 + 1)100 = 220 ns</a:t>
+            </a:r>
+          </a:p>
+          <a:p>
+            <a:pPr>
+              <a:spcBef>
+                <a:spcPts val="500"/>
+              </a:spcBef>
+              <a:defRPr sz="1400">
+                <a:solidFill>
+                  <a:srgbClr val="26303E"/>
+                </a:solidFill>
+                <a:latin typeface="Aptos"/>
+              </a:defRPr>
+            </a:pPr>
+            <a:r>
+              <a:t>EAT = 0.8(120) + 0.2(220) = 96 + 44</a:t>
+            </a:r>
+          </a:p>
+        </p:txBody>
+      </p:sp>
+      <p:sp>
+        <p:nvSpPr>
+          <p:cNvPr id="8" name="Rounded Rectangle 7"/>
+          <p:cNvSpPr/>
+          <p:nvPr/>
+        </p:nvSpPr>
+        <p:spPr>
+          <a:xfrm>
+            <a:off x="7818438" y="5239512"/>
+            <a:ext cx="3337560" cy="438912"/>
+          </a:xfrm>
+          <a:prstGeom prst="roundRect">
+            <a:avLst/>
+          </a:prstGeom>
+          <a:solidFill>
+            <a:srgbClr val="118580"/>
+          </a:solidFill>
+          <a:ln>
+            <a:noFill/>
+          </a:ln>
+        </p:spPr>
+        <p:style>
+          <a:lnRef idx="1">
+            <a:schemeClr val="accent1"/>
+          </a:lnRef>
+          <a:fillRef idx="3">
+            <a:schemeClr val="accent1"/>
+          </a:fillRef>
+          <a:effectRef idx="2">
+            <a:schemeClr val="accent1"/>
+          </a:effectRef>
+          <a:fontRef idx="minor">
+            <a:schemeClr val="lt1"/>
+          </a:fontRef>
+        </p:style>
+        <p:txBody>
+          <a:bodyPr rtlCol="0" anchor="ctr"/>
+          <a:lstStyle/>
+          <a:p>
+            <a:pPr algn="ctr">
+              <a:defRPr sz="2000" b="1">
+                <a:solidFill>
+                  <a:srgbClr val="FFFFFF"/>
+                </a:solidFill>
+                <a:latin typeface="Aptos Display"/>
+              </a:defRPr>
+            </a:pPr>
+            <a:r>
+              <a:t>EAT = 140 ns</a:t>
+            </a:r>
+          </a:p>
+        </p:txBody>
+      </p:sp>
+      <p:sp>
+        <p:nvSpPr>
+          <p:cNvPr id="9" name="TextBox 8"/>
+          <p:cNvSpPr txBox="1"/>
+          <p:nvPr/>
+        </p:nvSpPr>
+        <p:spPr>
+          <a:xfrm>
+            <a:off x="567246" y="6172200"/>
+            <a:ext cx="6052820" cy="275590"/>
+          </a:xfrm>
+          <a:prstGeom prst="rect">
+            <a:avLst/>
+          </a:prstGeom>
+          <a:noFill/>
+        </p:spPr>
+        <p:txBody>
+          <a:bodyPr wrap="none">
+            <a:spAutoFit/>
+          </a:bodyPr>
+          <a:lstStyle/>
+          <a:p>
+            <a:pPr>
+              <a:defRPr sz="1200" i="1">
+                <a:solidFill>
+                  <a:srgbClr val="5B697C"/>
+                </a:solidFill>
+                <a:latin typeface="Aptos"/>
+              </a:defRPr>
+            </a:pPr>
+            <a:r>
+              <a:t>Remember: a TLB hit avoids extra page-table memory accesses; a miss requires them.</a:t>
+            </a:r>
+          </a:p>
+        </p:txBody>
+      </p:sp>
+    </p:spTree>
+  </p:cSld>
+  <p:clrMapOvr>
+    <a:masterClrMapping/>
+  </p:clrMapOvr>
+</p:sld>
+</file>
+
+<file path=ppt/slides/slide44.xml><?xml version="1.0" encoding="utf-8"?>
 <p:sld xmlns:a="http://schemas.openxmlformats.org/drawingml/2006/main" xmlns:r="http://schemas.openxmlformats.org/officeDocument/2006/relationships" xmlns:p="http://schemas.openxmlformats.org/presentationml/2006/main">
   <p:cSld>
     <p:spTree>
@@ -16021,7 +18559,7 @@
 </p:sld>
 </file>
 
-<file path=ppt/slides/slide39.xml><?xml version="1.0" encoding="utf-8"?>
+<file path=ppt/slides/slide45.xml><?xml version="1.0" encoding="utf-8"?>
 <p:sld xmlns:a="http://schemas.openxmlformats.org/drawingml/2006/main" xmlns:r="http://schemas.openxmlformats.org/officeDocument/2006/relationships" xmlns:p="http://schemas.openxmlformats.org/presentationml/2006/main">
   <p:cSld>
     <p:spTree>
@@ -16240,7 +18778,7 @@
 </p:sld>
 </file>
 
-<file path=ppt/slides/slide4.xml><?xml version="1.0" encoding="utf-8"?>
+<file path=ppt/slides/slide46.xml><?xml version="1.0" encoding="utf-8"?>
 <p:sld xmlns:a="http://schemas.openxmlformats.org/drawingml/2006/main" xmlns:r="http://schemas.openxmlformats.org/officeDocument/2006/relationships" xmlns:p="http://schemas.openxmlformats.org/presentationml/2006/main">
   <p:cSld>
     <p:spTree>
@@ -16289,108 +18827,106 @@
       </p:sp>
       <p:sp>
         <p:nvSpPr>
-          <p:cNvPr id="3" name="Content Placeholder 2"/>
+          <p:cNvPr id="4" name="AutoShape 2" descr="PAGING&#10;MEMORY MANAGEMENT                                       New Concept!!&#10;&#10;&#10;•   Logical address space of a process can be noncontiguous; process is&#10;    allocated physical memory whenever that memory is available and the&#10;    program needs it.&#10;•   Divide physical memory into fixed-sized blocks called frames (size is&#10;    power of 2, between 512 bytes and 8192 bytes).&#10;•   Divide logical memory into blocks of same size called pages.&#10;•   Keep track of all free frames.&#10;•   To run a program of size n pages, need to find n free frames and load&#10;    program.&#10;•   Set up a page table to translate logical to physical addresses.&#10;•   Internal fragmentation.&#10;&#10;&#10;&#10;                            8: Memory Management                     20&#10; "/>
           <p:cNvSpPr>
-            <a:spLocks noGrp="1"/>
+            <a:spLocks noChangeAspect="1" noChangeArrowheads="1"/>
           </p:cNvSpPr>
-          <p:nvPr>
-            <p:ph idx="1"/>
-          </p:nvPr>
+          <p:nvPr/>
+        </p:nvSpPr>
+        <p:spPr bwMode="auto">
+          <a:xfrm>
+            <a:off x="5943600" y="3276600"/>
+            <a:ext cx="304800" cy="304800"/>
+          </a:xfrm>
+          <a:prstGeom prst="rect">
+            <a:avLst/>
+          </a:prstGeom>
+          <a:noFill/>
+          <a:extLst>
+            <a:ext uri="{909E8E84-426E-40DD-AFC4-6F175D3DCCD1}">
+              <a14:hiddenFill xmlns:a14="http://schemas.microsoft.com/office/drawing/2010/main">
+                <a:solidFill>
+                  <a:srgbClr val="FFFFFF"/>
+                </a:solidFill>
+              </a14:hiddenFill>
+            </a:ext>
+          </a:extLst>
+        </p:spPr>
+        <p:txBody>
+          <a:bodyPr vert="horz" wrap="square" lIns="91440" tIns="45720" rIns="91440" bIns="45720" numCol="1" anchor="t" anchorCtr="0" compatLnSpc="1"/>
+          <a:lstStyle/>
+          <a:p>
+            <a:endParaRPr lang="en-IN"/>
+          </a:p>
+        </p:txBody>
+      </p:sp>
+      <p:sp>
+        <p:nvSpPr>
+          <p:cNvPr id="6" name="TextBox 5"/>
+          <p:cNvSpPr txBox="1"/>
+          <p:nvPr/>
         </p:nvSpPr>
         <p:spPr>
           <a:xfrm>
             <a:off x="1069848" y="1214438"/>
-            <a:ext cx="10058400" cy="4957762"/>
+            <a:ext cx="9244012" cy="523220"/>
           </a:xfrm>
+          <a:prstGeom prst="rect">
+            <a:avLst/>
+          </a:prstGeom>
+          <a:noFill/>
         </p:spPr>
         <p:txBody>
-          <a:bodyPr/>
+          <a:bodyPr wrap="square" rtlCol="0">
+            <a:spAutoFit/>
+          </a:bodyPr>
           <a:lstStyle/>
           <a:p>
-            <a:pPr marL="0" indent="0" algn="l" fontAlgn="base">
-              <a:buNone/>
-            </a:pPr>
-            <a:r>
-              <a:rPr lang="en-IN" sz="2000" b="1" i="0" dirty="0">
-                <a:solidFill>
-                  <a:srgbClr val="273239"/>
-                </a:solidFill>
-                <a:effectLst/>
-                <a:latin typeface="Nunito" pitchFamily="2" charset="0"/>
-              </a:rPr>
-              <a:t>Memory Management</a:t>
-            </a:r>
-            <a:endParaRPr lang="en-IN" sz="2000" b="1" i="0" dirty="0">
-              <a:solidFill>
-                <a:srgbClr val="273239"/>
-              </a:solidFill>
-              <a:effectLst/>
-              <a:latin typeface="Nunito" pitchFamily="2" charset="0"/>
-            </a:endParaRPr>
-          </a:p>
-          <a:p>
-            <a:pPr marL="0" indent="0" algn="l" fontAlgn="base">
-              <a:buNone/>
-            </a:pPr>
-            <a:r>
-              <a:rPr lang="en-US" b="0" i="0" dirty="0">
-                <a:solidFill>
-                  <a:srgbClr val="273239"/>
+            <a:r>
+              <a:rPr lang="en-IN" sz="2800" b="1" dirty="0"/>
+              <a:t>Numerical on EAT</a:t>
+            </a:r>
+            <a:endParaRPr lang="en-IN" sz="2800" b="1" dirty="0"/>
+          </a:p>
+        </p:txBody>
+      </p:sp>
+      <p:sp>
+        <p:nvSpPr>
+          <p:cNvPr id="3" name="TextBox 2"/>
+          <p:cNvSpPr txBox="1"/>
+          <p:nvPr/>
+        </p:nvSpPr>
+        <p:spPr>
+          <a:xfrm>
+            <a:off x="1200150" y="1914525"/>
+            <a:ext cx="10058400" cy="4247317"/>
+          </a:xfrm>
+          <a:prstGeom prst="rect">
+            <a:avLst/>
+          </a:prstGeom>
+          <a:noFill/>
+        </p:spPr>
+        <p:txBody>
+          <a:bodyPr wrap="square" rtlCol="0">
+            <a:spAutoFit/>
+          </a:bodyPr>
+          <a:lstStyle/>
+          <a:p>
+            <a:r>
+              <a:rPr lang="en-US" sz="2400" b="0" i="0" dirty="0">
+                <a:solidFill>
+                  <a:srgbClr val="303030"/>
                 </a:solidFill>
                 <a:effectLst/>
                 <a:latin typeface="Calibri" panose="020F0502020204030204" pitchFamily="34" charset="0"/>
                 <a:ea typeface="Calibri" panose="020F0502020204030204" pitchFamily="34" charset="0"/>
                 <a:cs typeface="Calibri" panose="020F0502020204030204" pitchFamily="34" charset="0"/>
               </a:rPr>
-              <a:t>In a multiprogramming computer, the </a:t>
-            </a:r>
-            <a:r>
-              <a:rPr lang="en-US" b="0" i="0" u="sng" dirty="0">
-                <a:effectLst/>
-                <a:latin typeface="Calibri" panose="020F0502020204030204" pitchFamily="34" charset="0"/>
-                <a:ea typeface="Calibri" panose="020F0502020204030204" pitchFamily="34" charset="0"/>
-                <a:cs typeface="Calibri" panose="020F0502020204030204" pitchFamily="34" charset="0"/>
-              </a:rPr>
-              <a:t>Operating System</a:t>
-            </a:r>
-            <a:r>
-              <a:rPr lang="en-US" b="0" i="0" dirty="0">
-                <a:solidFill>
-                  <a:srgbClr val="273239"/>
-                </a:solidFill>
-                <a:effectLst/>
-                <a:latin typeface="Calibri" panose="020F0502020204030204" pitchFamily="34" charset="0"/>
-                <a:ea typeface="Calibri" panose="020F0502020204030204" pitchFamily="34" charset="0"/>
-                <a:cs typeface="Calibri" panose="020F0502020204030204" pitchFamily="34" charset="0"/>
-              </a:rPr>
-              <a:t> resides in a part of memory, and the rest is used by multiple processes. The task of subdividing the memory among different processes is called </a:t>
-            </a:r>
-            <a:r>
-              <a:rPr lang="en-US" b="1" i="0" dirty="0">
-                <a:solidFill>
-                  <a:srgbClr val="273239"/>
-                </a:solidFill>
-                <a:effectLst/>
-                <a:latin typeface="Calibri" panose="020F0502020204030204" pitchFamily="34" charset="0"/>
-                <a:ea typeface="Calibri" panose="020F0502020204030204" pitchFamily="34" charset="0"/>
-                <a:cs typeface="Calibri" panose="020F0502020204030204" pitchFamily="34" charset="0"/>
-              </a:rPr>
-              <a:t>Memory Management</a:t>
-            </a:r>
-            <a:r>
-              <a:rPr lang="en-IN" b="1" dirty="0">
-                <a:solidFill>
-                  <a:srgbClr val="273239"/>
-                </a:solidFill>
-                <a:latin typeface="Calibri" panose="020F0502020204030204" pitchFamily="34" charset="0"/>
-                <a:ea typeface="Calibri" panose="020F0502020204030204" pitchFamily="34" charset="0"/>
-                <a:cs typeface="Calibri" panose="020F0502020204030204" pitchFamily="34" charset="0"/>
-              </a:rPr>
-              <a:t>.</a:t>
-            </a:r>
-            <a:endParaRPr lang="en-IN" sz="2000" b="1" i="0" dirty="0">
+              <a:t>Solution:</a:t>
+            </a:r>
+            <a:endParaRPr lang="en-US" sz="2400" b="0" i="0" dirty="0">
               <a:solidFill>
-                <a:srgbClr val="273239"/>
+                <a:srgbClr val="303030"/>
               </a:solidFill>
               <a:effectLst/>
               <a:latin typeface="Calibri" panose="020F0502020204030204" pitchFamily="34" charset="0"/>
@@ -16399,47 +18935,32 @@
             </a:endParaRPr>
           </a:p>
           <a:p>
-            <a:pPr marL="0" indent="0">
-              <a:buNone/>
-            </a:pPr>
-            <a:endParaRPr lang="en-IN" dirty="0"/>
-          </a:p>
-          <a:p>
-            <a:pPr marL="0" indent="0">
-              <a:buNone/>
-            </a:pPr>
-            <a:r>
-              <a:rPr lang="en-IN" dirty="0"/>
-              <a:t>Need of Memory Management</a:t>
-            </a:r>
-            <a:endParaRPr lang="en-IN" dirty="0"/>
-          </a:p>
-          <a:p>
-            <a:pPr marL="0" indent="0">
-              <a:buNone/>
-            </a:pPr>
-            <a:endParaRPr lang="en-IN" dirty="0"/>
-          </a:p>
-          <a:p>
-            <a:pPr algn="l" fontAlgn="base">
-              <a:buFont typeface="Wingdings" panose="05000000000000000000" pitchFamily="2" charset="2"/>
-              <a:buChar char="ü"/>
-            </a:pPr>
-            <a:r>
-              <a:rPr lang="en-US" b="0" i="0" dirty="0">
-                <a:solidFill>
-                  <a:srgbClr val="273239"/>
+            <a:endParaRPr lang="en-US" sz="2400" dirty="0">
+              <a:solidFill>
+                <a:srgbClr val="303030"/>
+              </a:solidFill>
+              <a:latin typeface="Calibri" panose="020F0502020204030204" pitchFamily="34" charset="0"/>
+              <a:ea typeface="Calibri" panose="020F0502020204030204" pitchFamily="34" charset="0"/>
+              <a:cs typeface="Calibri" panose="020F0502020204030204" pitchFamily="34" charset="0"/>
+            </a:endParaRPr>
+          </a:p>
+          <a:p>
+            <a:pPr algn="l" fontAlgn="base"/>
+            <a:r>
+              <a:rPr lang="en-US" sz="2400" b="0" i="0" dirty="0">
+                <a:solidFill>
+                  <a:srgbClr val="303030"/>
                 </a:solidFill>
                 <a:effectLst/>
                 <a:latin typeface="Calibri" panose="020F0502020204030204" pitchFamily="34" charset="0"/>
                 <a:ea typeface="Calibri" panose="020F0502020204030204" pitchFamily="34" charset="0"/>
                 <a:cs typeface="Calibri" panose="020F0502020204030204" pitchFamily="34" charset="0"/>
               </a:rPr>
-              <a:t>Allocate and de-allocate memory before and after process execution.</a:t>
-            </a:r>
-            <a:endParaRPr lang="en-US" b="0" i="0" dirty="0">
+              <a:t>Effective Access Time</a:t>
+            </a:r>
+            <a:endParaRPr lang="en-US" sz="2400" b="0" i="0" dirty="0">
               <a:solidFill>
-                <a:srgbClr val="273239"/>
+                <a:srgbClr val="303030"/>
               </a:solidFill>
               <a:effectLst/>
               <a:latin typeface="Calibri" panose="020F0502020204030204" pitchFamily="34" charset="0"/>
@@ -16448,25 +18969,22 @@
             </a:endParaRPr>
           </a:p>
           <a:p>
-            <a:pPr algn="l" fontAlgn="base">
-              <a:buFont typeface="Wingdings" panose="05000000000000000000" pitchFamily="2" charset="2"/>
-              <a:buChar char="ü"/>
-            </a:pPr>
-            <a:r>
-              <a:rPr lang="en-US" b="0" i="0" dirty="0">
-                <a:solidFill>
-                  <a:srgbClr val="273239"/>
+            <a:pPr algn="l" fontAlgn="base"/>
+            <a:r>
+              <a:rPr lang="en-US" sz="2400" b="0" i="0" dirty="0">
+                <a:solidFill>
+                  <a:srgbClr val="303030"/>
                 </a:solidFill>
                 <a:effectLst/>
                 <a:latin typeface="Calibri" panose="020F0502020204030204" pitchFamily="34" charset="0"/>
                 <a:ea typeface="Calibri" panose="020F0502020204030204" pitchFamily="34" charset="0"/>
                 <a:cs typeface="Calibri" panose="020F0502020204030204" pitchFamily="34" charset="0"/>
               </a:rPr>
-              <a:t>To keep track of used memory space by processes.</a:t>
-            </a:r>
-            <a:endParaRPr lang="en-US" b="0" i="0" dirty="0">
+              <a:t>= 0.8 x { 20 ns + 100 ns } + 0.2 x { 20 ns + (1+1) x 100 ns }</a:t>
+            </a:r>
+            <a:endParaRPr lang="en-US" sz="2400" b="0" i="0" dirty="0">
               <a:solidFill>
-                <a:srgbClr val="273239"/>
+                <a:srgbClr val="303030"/>
               </a:solidFill>
               <a:effectLst/>
               <a:latin typeface="Calibri" panose="020F0502020204030204" pitchFamily="34" charset="0"/>
@@ -16475,49 +18993,22 @@
             </a:endParaRPr>
           </a:p>
           <a:p>
-            <a:pPr algn="l" fontAlgn="base">
-              <a:buFont typeface="Wingdings" panose="05000000000000000000" pitchFamily="2" charset="2"/>
-              <a:buChar char="ü"/>
-            </a:pPr>
-            <a:r>
-              <a:rPr lang="en-US" b="0" i="0" dirty="0">
-                <a:solidFill>
-                  <a:srgbClr val="273239"/>
+            <a:pPr algn="l" fontAlgn="base"/>
+            <a:r>
+              <a:rPr lang="en-US" sz="2400" b="0" i="0" dirty="0">
+                <a:solidFill>
+                  <a:srgbClr val="303030"/>
                 </a:solidFill>
                 <a:effectLst/>
                 <a:latin typeface="Calibri" panose="020F0502020204030204" pitchFamily="34" charset="0"/>
                 <a:ea typeface="Calibri" panose="020F0502020204030204" pitchFamily="34" charset="0"/>
                 <a:cs typeface="Calibri" panose="020F0502020204030204" pitchFamily="34" charset="0"/>
               </a:rPr>
-              <a:t>To minimize </a:t>
-            </a:r>
-            <a:r>
-              <a:rPr lang="en-US" b="0" i="0" u="sng" dirty="0">
-                <a:solidFill>
-                  <a:srgbClr val="273239"/>
-                </a:solidFill>
-                <a:effectLst/>
-                <a:latin typeface="Calibri" panose="020F0502020204030204" pitchFamily="34" charset="0"/>
-                <a:ea typeface="Calibri" panose="020F0502020204030204" pitchFamily="34" charset="0"/>
-                <a:cs typeface="Calibri" panose="020F0502020204030204" pitchFamily="34" charset="0"/>
-              </a:rPr>
-              <a:t>fragmentation </a:t>
-            </a:r>
-            <a:r>
-              <a:rPr lang="en-US" b="0" i="0" dirty="0">
-                <a:solidFill>
-                  <a:srgbClr val="273239"/>
-                </a:solidFill>
-                <a:effectLst/>
-                <a:latin typeface="Calibri" panose="020F0502020204030204" pitchFamily="34" charset="0"/>
-                <a:ea typeface="Calibri" panose="020F0502020204030204" pitchFamily="34" charset="0"/>
-                <a:cs typeface="Calibri" panose="020F0502020204030204" pitchFamily="34" charset="0"/>
-              </a:rPr>
-              <a:t>issues.</a:t>
-            </a:r>
-            <a:endParaRPr lang="en-US" b="0" i="0" dirty="0">
+              <a:t>= 0.8 x 120 ns + 0.2 + 220 ns</a:t>
+            </a:r>
+            <a:endParaRPr lang="en-US" sz="2400" b="0" i="0" dirty="0">
               <a:solidFill>
-                <a:srgbClr val="273239"/>
+                <a:srgbClr val="303030"/>
               </a:solidFill>
               <a:effectLst/>
               <a:latin typeface="Calibri" panose="020F0502020204030204" pitchFamily="34" charset="0"/>
@@ -16526,25 +19017,22 @@
             </a:endParaRPr>
           </a:p>
           <a:p>
-            <a:pPr algn="l" fontAlgn="base">
-              <a:buFont typeface="Wingdings" panose="05000000000000000000" pitchFamily="2" charset="2"/>
-              <a:buChar char="ü"/>
-            </a:pPr>
-            <a:r>
-              <a:rPr lang="en-US" b="0" i="0" dirty="0">
-                <a:solidFill>
-                  <a:srgbClr val="273239"/>
+            <a:pPr algn="l" fontAlgn="base"/>
+            <a:r>
+              <a:rPr lang="en-US" sz="2400" b="0" i="0" dirty="0">
+                <a:solidFill>
+                  <a:srgbClr val="303030"/>
                 </a:solidFill>
                 <a:effectLst/>
                 <a:latin typeface="Calibri" panose="020F0502020204030204" pitchFamily="34" charset="0"/>
                 <a:ea typeface="Calibri" panose="020F0502020204030204" pitchFamily="34" charset="0"/>
                 <a:cs typeface="Calibri" panose="020F0502020204030204" pitchFamily="34" charset="0"/>
               </a:rPr>
-              <a:t>To proper utilization of main memory.</a:t>
-            </a:r>
-            <a:endParaRPr lang="en-US" b="0" i="0" dirty="0">
+              <a:t>= 96 ns + 44 ns</a:t>
+            </a:r>
+            <a:endParaRPr lang="en-US" sz="2400" b="0" i="0" dirty="0">
               <a:solidFill>
-                <a:srgbClr val="273239"/>
+                <a:srgbClr val="303030"/>
               </a:solidFill>
               <a:effectLst/>
               <a:latin typeface="Calibri" panose="020F0502020204030204" pitchFamily="34" charset="0"/>
@@ -16553,25 +19041,22 @@
             </a:endParaRPr>
           </a:p>
           <a:p>
-            <a:pPr algn="l" fontAlgn="base">
-              <a:buFont typeface="Wingdings" panose="05000000000000000000" pitchFamily="2" charset="2"/>
-              <a:buChar char="ü"/>
-            </a:pPr>
-            <a:r>
-              <a:rPr lang="en-US" b="0" i="0" dirty="0">
-                <a:solidFill>
-                  <a:srgbClr val="273239"/>
+            <a:pPr algn="l" fontAlgn="base"/>
+            <a:r>
+              <a:rPr lang="en-US" sz="2400" b="0" i="0" dirty="0">
+                <a:solidFill>
+                  <a:srgbClr val="303030"/>
                 </a:solidFill>
                 <a:effectLst/>
                 <a:latin typeface="Calibri" panose="020F0502020204030204" pitchFamily="34" charset="0"/>
                 <a:ea typeface="Calibri" panose="020F0502020204030204" pitchFamily="34" charset="0"/>
                 <a:cs typeface="Calibri" panose="020F0502020204030204" pitchFamily="34" charset="0"/>
               </a:rPr>
-              <a:t>To maintain data integrity while executing of process.</a:t>
-            </a:r>
-            <a:endParaRPr lang="en-US" b="0" i="0" dirty="0">
+              <a:t>= 140 ns</a:t>
+            </a:r>
+            <a:endParaRPr lang="en-US" sz="2400" b="0" i="0" dirty="0">
               <a:solidFill>
-                <a:srgbClr val="273239"/>
+                <a:srgbClr val="303030"/>
               </a:solidFill>
               <a:effectLst/>
               <a:latin typeface="Calibri" panose="020F0502020204030204" pitchFamily="34" charset="0"/>
@@ -16580,10 +19065,80 @@
             </a:endParaRPr>
           </a:p>
           <a:p>
-            <a:pPr marL="0" indent="0">
-              <a:buNone/>
-            </a:pPr>
-            <a:endParaRPr lang="en-IN" dirty="0"/>
+            <a:pPr algn="l" fontAlgn="base"/>
+            <a:r>
+              <a:rPr lang="en-US" sz="2400" b="0" i="0" dirty="0">
+                <a:solidFill>
+                  <a:srgbClr val="303030"/>
+                </a:solidFill>
+                <a:effectLst/>
+                <a:latin typeface="Calibri" panose="020F0502020204030204" pitchFamily="34" charset="0"/>
+                <a:ea typeface="Calibri" panose="020F0502020204030204" pitchFamily="34" charset="0"/>
+                <a:cs typeface="Calibri" panose="020F0502020204030204" pitchFamily="34" charset="0"/>
+              </a:rPr>
+              <a:t>Thus, effective memory access time = 140 ns.</a:t>
+            </a:r>
+            <a:endParaRPr lang="en-US" sz="2400" b="0" i="0" dirty="0">
+              <a:solidFill>
+                <a:srgbClr val="303030"/>
+              </a:solidFill>
+              <a:effectLst/>
+              <a:latin typeface="Calibri" panose="020F0502020204030204" pitchFamily="34" charset="0"/>
+              <a:ea typeface="Calibri" panose="020F0502020204030204" pitchFamily="34" charset="0"/>
+              <a:cs typeface="Calibri" panose="020F0502020204030204" pitchFamily="34" charset="0"/>
+            </a:endParaRPr>
+          </a:p>
+          <a:p>
+            <a:pPr algn="l" fontAlgn="base"/>
+            <a:r>
+              <a:rPr lang="en-US" sz="2400" b="0" i="0" dirty="0">
+                <a:solidFill>
+                  <a:srgbClr val="303030"/>
+                </a:solidFill>
+                <a:effectLst/>
+                <a:latin typeface="Calibri" panose="020F0502020204030204" pitchFamily="34" charset="0"/>
+                <a:ea typeface="Calibri" panose="020F0502020204030204" pitchFamily="34" charset="0"/>
+                <a:cs typeface="Calibri" panose="020F0502020204030204" pitchFamily="34" charset="0"/>
+              </a:rPr>
+              <a:t> </a:t>
+            </a:r>
+            <a:endParaRPr lang="en-US" sz="2400" b="0" i="0" dirty="0">
+              <a:solidFill>
+                <a:srgbClr val="303030"/>
+              </a:solidFill>
+              <a:effectLst/>
+              <a:latin typeface="Calibri" panose="020F0502020204030204" pitchFamily="34" charset="0"/>
+              <a:ea typeface="Calibri" panose="020F0502020204030204" pitchFamily="34" charset="0"/>
+              <a:cs typeface="Calibri" panose="020F0502020204030204" pitchFamily="34" charset="0"/>
+            </a:endParaRPr>
+          </a:p>
+          <a:p>
+            <a:endParaRPr lang="en-US" b="0" i="0" dirty="0">
+              <a:solidFill>
+                <a:srgbClr val="303030"/>
+              </a:solidFill>
+              <a:effectLst/>
+              <a:latin typeface="Calibri" panose="020F0502020204030204" pitchFamily="34" charset="0"/>
+              <a:ea typeface="Calibri" panose="020F0502020204030204" pitchFamily="34" charset="0"/>
+              <a:cs typeface="Calibri" panose="020F0502020204030204" pitchFamily="34" charset="0"/>
+            </a:endParaRPr>
+          </a:p>
+          <a:p>
+            <a:endParaRPr lang="en-US" dirty="0">
+              <a:solidFill>
+                <a:srgbClr val="303030"/>
+              </a:solidFill>
+              <a:latin typeface="Calibri" panose="020F0502020204030204" pitchFamily="34" charset="0"/>
+              <a:ea typeface="Calibri" panose="020F0502020204030204" pitchFamily="34" charset="0"/>
+              <a:cs typeface="Calibri" panose="020F0502020204030204" pitchFamily="34" charset="0"/>
+            </a:endParaRPr>
+          </a:p>
+          <a:p>
+            <a:endParaRPr lang="en-IN" dirty="0">
+              <a:latin typeface="Calibri" panose="020F0502020204030204" pitchFamily="34" charset="0"/>
+              <a:ea typeface="Calibri" panose="020F0502020204030204" pitchFamily="34" charset="0"/>
+              <a:cs typeface="Calibri" panose="020F0502020204030204" pitchFamily="34" charset="0"/>
+            </a:endParaRPr>
           </a:p>
         </p:txBody>
       </p:sp>
@@ -16595,7 +19150,7 @@
 </p:sld>
 </file>
 
-<file path=ppt/slides/slide40.xml><?xml version="1.0" encoding="utf-8"?>
+<file path=ppt/slides/slide47.xml><?xml version="1.0" encoding="utf-8"?>
 <p:sld xmlns:a="http://schemas.openxmlformats.org/drawingml/2006/main" xmlns:r="http://schemas.openxmlformats.org/officeDocument/2006/relationships" xmlns:p="http://schemas.openxmlformats.org/presentationml/2006/main">
   <p:cSld>
     <p:spTree>
@@ -16701,378 +19256,6 @@
           <a:p>
             <a:r>
               <a:rPr lang="en-IN" sz="2800" b="1" dirty="0"/>
-              <a:t>Numerical on EAT</a:t>
-            </a:r>
-            <a:endParaRPr lang="en-IN" sz="2800" b="1" dirty="0"/>
-          </a:p>
-        </p:txBody>
-      </p:sp>
-      <p:sp>
-        <p:nvSpPr>
-          <p:cNvPr id="3" name="TextBox 2"/>
-          <p:cNvSpPr txBox="1"/>
-          <p:nvPr/>
-        </p:nvSpPr>
-        <p:spPr>
-          <a:xfrm>
-            <a:off x="1200150" y="1914525"/>
-            <a:ext cx="10058400" cy="4247317"/>
-          </a:xfrm>
-          <a:prstGeom prst="rect">
-            <a:avLst/>
-          </a:prstGeom>
-          <a:noFill/>
-        </p:spPr>
-        <p:txBody>
-          <a:bodyPr wrap="square" rtlCol="0">
-            <a:spAutoFit/>
-          </a:bodyPr>
-          <a:lstStyle/>
-          <a:p>
-            <a:r>
-              <a:rPr lang="en-US" sz="2400" b="0" i="0" dirty="0">
-                <a:solidFill>
-                  <a:srgbClr val="303030"/>
-                </a:solidFill>
-                <a:effectLst/>
-                <a:latin typeface="Calibri" panose="020F0502020204030204" pitchFamily="34" charset="0"/>
-                <a:ea typeface="Calibri" panose="020F0502020204030204" pitchFamily="34" charset="0"/>
-                <a:cs typeface="Calibri" panose="020F0502020204030204" pitchFamily="34" charset="0"/>
-              </a:rPr>
-              <a:t>Solution:</a:t>
-            </a:r>
-            <a:endParaRPr lang="en-US" sz="2400" b="0" i="0" dirty="0">
-              <a:solidFill>
-                <a:srgbClr val="303030"/>
-              </a:solidFill>
-              <a:effectLst/>
-              <a:latin typeface="Calibri" panose="020F0502020204030204" pitchFamily="34" charset="0"/>
-              <a:ea typeface="Calibri" panose="020F0502020204030204" pitchFamily="34" charset="0"/>
-              <a:cs typeface="Calibri" panose="020F0502020204030204" pitchFamily="34" charset="0"/>
-            </a:endParaRPr>
-          </a:p>
-          <a:p>
-            <a:endParaRPr lang="en-US" sz="2400" dirty="0">
-              <a:solidFill>
-                <a:srgbClr val="303030"/>
-              </a:solidFill>
-              <a:latin typeface="Calibri" panose="020F0502020204030204" pitchFamily="34" charset="0"/>
-              <a:ea typeface="Calibri" panose="020F0502020204030204" pitchFamily="34" charset="0"/>
-              <a:cs typeface="Calibri" panose="020F0502020204030204" pitchFamily="34" charset="0"/>
-            </a:endParaRPr>
-          </a:p>
-          <a:p>
-            <a:pPr algn="l" fontAlgn="base"/>
-            <a:r>
-              <a:rPr lang="en-US" sz="2400" b="0" i="0" dirty="0">
-                <a:solidFill>
-                  <a:srgbClr val="303030"/>
-                </a:solidFill>
-                <a:effectLst/>
-                <a:latin typeface="Calibri" panose="020F0502020204030204" pitchFamily="34" charset="0"/>
-                <a:ea typeface="Calibri" panose="020F0502020204030204" pitchFamily="34" charset="0"/>
-                <a:cs typeface="Calibri" panose="020F0502020204030204" pitchFamily="34" charset="0"/>
-              </a:rPr>
-              <a:t>Effective Access Time</a:t>
-            </a:r>
-            <a:endParaRPr lang="en-US" sz="2400" b="0" i="0" dirty="0">
-              <a:solidFill>
-                <a:srgbClr val="303030"/>
-              </a:solidFill>
-              <a:effectLst/>
-              <a:latin typeface="Calibri" panose="020F0502020204030204" pitchFamily="34" charset="0"/>
-              <a:ea typeface="Calibri" panose="020F0502020204030204" pitchFamily="34" charset="0"/>
-              <a:cs typeface="Calibri" panose="020F0502020204030204" pitchFamily="34" charset="0"/>
-            </a:endParaRPr>
-          </a:p>
-          <a:p>
-            <a:pPr algn="l" fontAlgn="base"/>
-            <a:r>
-              <a:rPr lang="en-US" sz="2400" b="0" i="0" dirty="0">
-                <a:solidFill>
-                  <a:srgbClr val="303030"/>
-                </a:solidFill>
-                <a:effectLst/>
-                <a:latin typeface="Calibri" panose="020F0502020204030204" pitchFamily="34" charset="0"/>
-                <a:ea typeface="Calibri" panose="020F0502020204030204" pitchFamily="34" charset="0"/>
-                <a:cs typeface="Calibri" panose="020F0502020204030204" pitchFamily="34" charset="0"/>
-              </a:rPr>
-              <a:t>= 0.8 x { 20 ns + 100 ns } + 0.2 x { 20 ns + (1+1) x 100 ns }</a:t>
-            </a:r>
-            <a:endParaRPr lang="en-US" sz="2400" b="0" i="0" dirty="0">
-              <a:solidFill>
-                <a:srgbClr val="303030"/>
-              </a:solidFill>
-              <a:effectLst/>
-              <a:latin typeface="Calibri" panose="020F0502020204030204" pitchFamily="34" charset="0"/>
-              <a:ea typeface="Calibri" panose="020F0502020204030204" pitchFamily="34" charset="0"/>
-              <a:cs typeface="Calibri" panose="020F0502020204030204" pitchFamily="34" charset="0"/>
-            </a:endParaRPr>
-          </a:p>
-          <a:p>
-            <a:pPr algn="l" fontAlgn="base"/>
-            <a:r>
-              <a:rPr lang="en-US" sz="2400" b="0" i="0" dirty="0">
-                <a:solidFill>
-                  <a:srgbClr val="303030"/>
-                </a:solidFill>
-                <a:effectLst/>
-                <a:latin typeface="Calibri" panose="020F0502020204030204" pitchFamily="34" charset="0"/>
-                <a:ea typeface="Calibri" panose="020F0502020204030204" pitchFamily="34" charset="0"/>
-                <a:cs typeface="Calibri" panose="020F0502020204030204" pitchFamily="34" charset="0"/>
-              </a:rPr>
-              <a:t>= 0.8 x 120 ns + 0.2 + 220 ns</a:t>
-            </a:r>
-            <a:endParaRPr lang="en-US" sz="2400" b="0" i="0" dirty="0">
-              <a:solidFill>
-                <a:srgbClr val="303030"/>
-              </a:solidFill>
-              <a:effectLst/>
-              <a:latin typeface="Calibri" panose="020F0502020204030204" pitchFamily="34" charset="0"/>
-              <a:ea typeface="Calibri" panose="020F0502020204030204" pitchFamily="34" charset="0"/>
-              <a:cs typeface="Calibri" panose="020F0502020204030204" pitchFamily="34" charset="0"/>
-            </a:endParaRPr>
-          </a:p>
-          <a:p>
-            <a:pPr algn="l" fontAlgn="base"/>
-            <a:r>
-              <a:rPr lang="en-US" sz="2400" b="0" i="0" dirty="0">
-                <a:solidFill>
-                  <a:srgbClr val="303030"/>
-                </a:solidFill>
-                <a:effectLst/>
-                <a:latin typeface="Calibri" panose="020F0502020204030204" pitchFamily="34" charset="0"/>
-                <a:ea typeface="Calibri" panose="020F0502020204030204" pitchFamily="34" charset="0"/>
-                <a:cs typeface="Calibri" panose="020F0502020204030204" pitchFamily="34" charset="0"/>
-              </a:rPr>
-              <a:t>= 96 ns + 44 ns</a:t>
-            </a:r>
-            <a:endParaRPr lang="en-US" sz="2400" b="0" i="0" dirty="0">
-              <a:solidFill>
-                <a:srgbClr val="303030"/>
-              </a:solidFill>
-              <a:effectLst/>
-              <a:latin typeface="Calibri" panose="020F0502020204030204" pitchFamily="34" charset="0"/>
-              <a:ea typeface="Calibri" panose="020F0502020204030204" pitchFamily="34" charset="0"/>
-              <a:cs typeface="Calibri" panose="020F0502020204030204" pitchFamily="34" charset="0"/>
-            </a:endParaRPr>
-          </a:p>
-          <a:p>
-            <a:pPr algn="l" fontAlgn="base"/>
-            <a:r>
-              <a:rPr lang="en-US" sz="2400" b="0" i="0" dirty="0">
-                <a:solidFill>
-                  <a:srgbClr val="303030"/>
-                </a:solidFill>
-                <a:effectLst/>
-                <a:latin typeface="Calibri" panose="020F0502020204030204" pitchFamily="34" charset="0"/>
-                <a:ea typeface="Calibri" panose="020F0502020204030204" pitchFamily="34" charset="0"/>
-                <a:cs typeface="Calibri" panose="020F0502020204030204" pitchFamily="34" charset="0"/>
-              </a:rPr>
-              <a:t>= 140 ns</a:t>
-            </a:r>
-            <a:endParaRPr lang="en-US" sz="2400" b="0" i="0" dirty="0">
-              <a:solidFill>
-                <a:srgbClr val="303030"/>
-              </a:solidFill>
-              <a:effectLst/>
-              <a:latin typeface="Calibri" panose="020F0502020204030204" pitchFamily="34" charset="0"/>
-              <a:ea typeface="Calibri" panose="020F0502020204030204" pitchFamily="34" charset="0"/>
-              <a:cs typeface="Calibri" panose="020F0502020204030204" pitchFamily="34" charset="0"/>
-            </a:endParaRPr>
-          </a:p>
-          <a:p>
-            <a:pPr algn="l" fontAlgn="base"/>
-            <a:r>
-              <a:rPr lang="en-US" sz="2400" b="0" i="0" dirty="0">
-                <a:solidFill>
-                  <a:srgbClr val="303030"/>
-                </a:solidFill>
-                <a:effectLst/>
-                <a:latin typeface="Calibri" panose="020F0502020204030204" pitchFamily="34" charset="0"/>
-                <a:ea typeface="Calibri" panose="020F0502020204030204" pitchFamily="34" charset="0"/>
-                <a:cs typeface="Calibri" panose="020F0502020204030204" pitchFamily="34" charset="0"/>
-              </a:rPr>
-              <a:t>Thus, effective memory access time = 140 ns.</a:t>
-            </a:r>
-            <a:endParaRPr lang="en-US" sz="2400" b="0" i="0" dirty="0">
-              <a:solidFill>
-                <a:srgbClr val="303030"/>
-              </a:solidFill>
-              <a:effectLst/>
-              <a:latin typeface="Calibri" panose="020F0502020204030204" pitchFamily="34" charset="0"/>
-              <a:ea typeface="Calibri" panose="020F0502020204030204" pitchFamily="34" charset="0"/>
-              <a:cs typeface="Calibri" panose="020F0502020204030204" pitchFamily="34" charset="0"/>
-            </a:endParaRPr>
-          </a:p>
-          <a:p>
-            <a:pPr algn="l" fontAlgn="base"/>
-            <a:r>
-              <a:rPr lang="en-US" sz="2400" b="0" i="0" dirty="0">
-                <a:solidFill>
-                  <a:srgbClr val="303030"/>
-                </a:solidFill>
-                <a:effectLst/>
-                <a:latin typeface="Calibri" panose="020F0502020204030204" pitchFamily="34" charset="0"/>
-                <a:ea typeface="Calibri" panose="020F0502020204030204" pitchFamily="34" charset="0"/>
-                <a:cs typeface="Calibri" panose="020F0502020204030204" pitchFamily="34" charset="0"/>
-              </a:rPr>
-              <a:t> </a:t>
-            </a:r>
-            <a:endParaRPr lang="en-US" sz="2400" b="0" i="0" dirty="0">
-              <a:solidFill>
-                <a:srgbClr val="303030"/>
-              </a:solidFill>
-              <a:effectLst/>
-              <a:latin typeface="Calibri" panose="020F0502020204030204" pitchFamily="34" charset="0"/>
-              <a:ea typeface="Calibri" panose="020F0502020204030204" pitchFamily="34" charset="0"/>
-              <a:cs typeface="Calibri" panose="020F0502020204030204" pitchFamily="34" charset="0"/>
-            </a:endParaRPr>
-          </a:p>
-          <a:p>
-            <a:endParaRPr lang="en-US" b="0" i="0" dirty="0">
-              <a:solidFill>
-                <a:srgbClr val="303030"/>
-              </a:solidFill>
-              <a:effectLst/>
-              <a:latin typeface="Calibri" panose="020F0502020204030204" pitchFamily="34" charset="0"/>
-              <a:ea typeface="Calibri" panose="020F0502020204030204" pitchFamily="34" charset="0"/>
-              <a:cs typeface="Calibri" panose="020F0502020204030204" pitchFamily="34" charset="0"/>
-            </a:endParaRPr>
-          </a:p>
-          <a:p>
-            <a:endParaRPr lang="en-US" dirty="0">
-              <a:solidFill>
-                <a:srgbClr val="303030"/>
-              </a:solidFill>
-              <a:latin typeface="Calibri" panose="020F0502020204030204" pitchFamily="34" charset="0"/>
-              <a:ea typeface="Calibri" panose="020F0502020204030204" pitchFamily="34" charset="0"/>
-              <a:cs typeface="Calibri" panose="020F0502020204030204" pitchFamily="34" charset="0"/>
-            </a:endParaRPr>
-          </a:p>
-          <a:p>
-            <a:endParaRPr lang="en-IN" dirty="0">
-              <a:latin typeface="Calibri" panose="020F0502020204030204" pitchFamily="34" charset="0"/>
-              <a:ea typeface="Calibri" panose="020F0502020204030204" pitchFamily="34" charset="0"/>
-              <a:cs typeface="Calibri" panose="020F0502020204030204" pitchFamily="34" charset="0"/>
-            </a:endParaRPr>
-          </a:p>
-        </p:txBody>
-      </p:sp>
-    </p:spTree>
-  </p:cSld>
-  <p:clrMapOvr>
-    <a:masterClrMapping/>
-  </p:clrMapOvr>
-</p:sld>
-</file>
-
-<file path=ppt/slides/slide41.xml><?xml version="1.0" encoding="utf-8"?>
-<p:sld xmlns:a="http://schemas.openxmlformats.org/drawingml/2006/main" xmlns:r="http://schemas.openxmlformats.org/officeDocument/2006/relationships" xmlns:p="http://schemas.openxmlformats.org/presentationml/2006/main">
-  <p:cSld>
-    <p:spTree>
-      <p:nvGrpSpPr>
-        <p:cNvPr id="1" name=""/>
-        <p:cNvGrpSpPr/>
-        <p:nvPr/>
-      </p:nvGrpSpPr>
-      <p:grpSpPr>
-        <a:xfrm>
-          <a:off x="0" y="0"/>
-          <a:ext cx="0" cy="0"/>
-          <a:chOff x="0" y="0"/>
-          <a:chExt cx="0" cy="0"/>
-        </a:xfrm>
-      </p:grpSpPr>
-      <p:sp>
-        <p:nvSpPr>
-          <p:cNvPr id="2" name="Title 1"/>
-          <p:cNvSpPr>
-            <a:spLocks noGrp="1"/>
-          </p:cNvSpPr>
-          <p:nvPr>
-            <p:ph type="title"/>
-          </p:nvPr>
-        </p:nvSpPr>
-        <p:spPr>
-          <a:xfrm>
-            <a:off x="1069848" y="484632"/>
-            <a:ext cx="10058400" cy="558356"/>
-          </a:xfrm>
-        </p:spPr>
-        <p:txBody>
-          <a:bodyPr>
-            <a:normAutofit fontScale="90000"/>
-          </a:bodyPr>
-          <a:lstStyle/>
-          <a:p>
-            <a:r>
-              <a:rPr lang="en-IN" dirty="0"/>
-              <a:t>MemORY MANAGEMENT</a:t>
-            </a:r>
-            <a:endParaRPr lang="en-IN" dirty="0"/>
-          </a:p>
-        </p:txBody>
-      </p:sp>
-      <p:sp>
-        <p:nvSpPr>
-          <p:cNvPr id="4" name="AutoShape 2" descr="PAGING&#10;MEMORY MANAGEMENT                                       New Concept!!&#10;&#10;&#10;•   Logical address space of a process can be noncontiguous; process is&#10;    allocated physical memory whenever that memory is available and the&#10;    program needs it.&#10;•   Divide physical memory into fixed-sized blocks called frames (size is&#10;    power of 2, between 512 bytes and 8192 bytes).&#10;•   Divide logical memory into blocks of same size called pages.&#10;•   Keep track of all free frames.&#10;•   To run a program of size n pages, need to find n free frames and load&#10;    program.&#10;•   Set up a page table to translate logical to physical addresses.&#10;•   Internal fragmentation.&#10;&#10;&#10;&#10;                            8: Memory Management                     20&#10; "/>
-          <p:cNvSpPr>
-            <a:spLocks noChangeAspect="1" noChangeArrowheads="1"/>
-          </p:cNvSpPr>
-          <p:nvPr/>
-        </p:nvSpPr>
-        <p:spPr bwMode="auto">
-          <a:xfrm>
-            <a:off x="5943600" y="3276600"/>
-            <a:ext cx="304800" cy="304800"/>
-          </a:xfrm>
-          <a:prstGeom prst="rect">
-            <a:avLst/>
-          </a:prstGeom>
-          <a:noFill/>
-          <a:extLst>
-            <a:ext uri="{909E8E84-426E-40DD-AFC4-6F175D3DCCD1}">
-              <a14:hiddenFill xmlns:a14="http://schemas.microsoft.com/office/drawing/2010/main">
-                <a:solidFill>
-                  <a:srgbClr val="FFFFFF"/>
-                </a:solidFill>
-              </a14:hiddenFill>
-            </a:ext>
-          </a:extLst>
-        </p:spPr>
-        <p:txBody>
-          <a:bodyPr vert="horz" wrap="square" lIns="91440" tIns="45720" rIns="91440" bIns="45720" numCol="1" anchor="t" anchorCtr="0" compatLnSpc="1"/>
-          <a:lstStyle/>
-          <a:p>
-            <a:endParaRPr lang="en-IN"/>
-          </a:p>
-        </p:txBody>
-      </p:sp>
-      <p:sp>
-        <p:nvSpPr>
-          <p:cNvPr id="6" name="TextBox 5"/>
-          <p:cNvSpPr txBox="1"/>
-          <p:nvPr/>
-        </p:nvSpPr>
-        <p:spPr>
-          <a:xfrm>
-            <a:off x="1069848" y="1214438"/>
-            <a:ext cx="9244012" cy="523220"/>
-          </a:xfrm>
-          <a:prstGeom prst="rect">
-            <a:avLst/>
-          </a:prstGeom>
-          <a:noFill/>
-        </p:spPr>
-        <p:txBody>
-          <a:bodyPr wrap="square" rtlCol="0">
-            <a:spAutoFit/>
-          </a:bodyPr>
-          <a:lstStyle/>
-          <a:p>
-            <a:r>
-              <a:rPr lang="en-IN" sz="2800" b="1" dirty="0"/>
               <a:t>PAGE REPLACEMENT ALGORITHMS</a:t>
             </a:r>
             <a:endParaRPr lang="en-IN" sz="2800" b="1" dirty="0"/>
@@ -17163,7 +19346,7 @@
 </p:sld>
 </file>
 
-<file path=ppt/slides/slide42.xml><?xml version="1.0" encoding="utf-8"?>
+<file path=ppt/slides/slide48.xml><?xml version="1.0" encoding="utf-8"?>
 <p:sld xmlns:a="http://schemas.openxmlformats.org/drawingml/2006/main" xmlns:r="http://schemas.openxmlformats.org/officeDocument/2006/relationships" xmlns:p="http://schemas.openxmlformats.org/presentationml/2006/main">
   <p:cSld>
     <p:spTree>
